--- a/Presentation.pptx
+++ b/Presentation.pptx
@@ -5,7 +5,7 @@
     <p:sldMasterId id="2147483648" r:id="rId1"/>
   </p:sldMasterIdLst>
   <p:notesMasterIdLst>
-    <p:notesMasterId r:id="rId27"/>
+    <p:notesMasterId r:id="rId30"/>
   </p:notesMasterIdLst>
   <p:sldIdLst>
     <p:sldId id="262" r:id="rId2"/>
@@ -30,9 +30,12 @@
     <p:sldId id="423" r:id="rId21"/>
     <p:sldId id="434" r:id="rId22"/>
     <p:sldId id="424" r:id="rId23"/>
-    <p:sldId id="378" r:id="rId24"/>
-    <p:sldId id="414" r:id="rId25"/>
-    <p:sldId id="437" r:id="rId26"/>
+    <p:sldId id="443" r:id="rId24"/>
+    <p:sldId id="445" r:id="rId25"/>
+    <p:sldId id="446" r:id="rId26"/>
+    <p:sldId id="378" r:id="rId27"/>
+    <p:sldId id="414" r:id="rId28"/>
+    <p:sldId id="437" r:id="rId29"/>
   </p:sldIdLst>
   <p:sldSz cx="12192000" cy="6858000"/>
   <p:notesSz cx="6858000" cy="9144000"/>
@@ -163,7 +166,7 @@
 <file path=ppt/revisionInfo.xml><?xml version="1.0" encoding="utf-8"?>
 <p1510:revInfo xmlns:a="http://schemas.openxmlformats.org/drawingml/2006/main" xmlns:r="http://schemas.openxmlformats.org/officeDocument/2006/relationships" xmlns:p1510="http://schemas.microsoft.com/office/powerpoint/2015/10/main">
   <p1510:revLst>
-    <p1510:client id="{0C7452EA-8525-8546-9411-43FD84E2388C}" v="496" dt="2026-03-18T14:01:50.638"/>
+    <p1510:client id="{0C7452EA-8525-8546-9411-43FD84E2388C}" v="1" dt="2026-04-01T17:30:05.641"/>
   </p1510:revLst>
 </p1510:revInfo>
 </file>
@@ -171,9 +174,175 @@
 <file path=ppt/changesInfos/changesInfo1.xml><?xml version="1.0" encoding="utf-8"?>
 <pc:chgInfo xmlns:a="http://schemas.openxmlformats.org/drawingml/2006/main" xmlns:r="http://schemas.openxmlformats.org/officeDocument/2006/relationships" xmlns:ac="http://schemas.microsoft.com/office/drawing/2013/main/command" xmlns:pc="http://schemas.microsoft.com/office/powerpoint/2013/main/command">
   <pc:docChgLst>
+    <pc:chgData name="DeMayo, Justin" userId="24cad3b6-f367-43ab-8aca-9f442ba0355f" providerId="ADAL" clId="{5D5391EE-6293-5AA7-A8D3-20EAD0A2D60D}"/>
+    <pc:docChg chg="undo custSel addSld delSld modSld sldOrd">
+      <pc:chgData name="DeMayo, Justin" userId="24cad3b6-f367-43ab-8aca-9f442ba0355f" providerId="ADAL" clId="{5D5391EE-6293-5AA7-A8D3-20EAD0A2D60D}" dt="2026-03-31T15:42:22.297" v="83" actId="1076"/>
+      <pc:docMkLst>
+        <pc:docMk/>
+      </pc:docMkLst>
+      <pc:sldChg chg="modSp mod">
+        <pc:chgData name="DeMayo, Justin" userId="24cad3b6-f367-43ab-8aca-9f442ba0355f" providerId="ADAL" clId="{5D5391EE-6293-5AA7-A8D3-20EAD0A2D60D}" dt="2026-03-31T15:42:22.297" v="83" actId="1076"/>
+        <pc:sldMkLst>
+          <pc:docMk/>
+          <pc:sldMk cId="3292860451" sldId="414"/>
+        </pc:sldMkLst>
+        <pc:spChg chg="mod">
+          <ac:chgData name="DeMayo, Justin" userId="24cad3b6-f367-43ab-8aca-9f442ba0355f" providerId="ADAL" clId="{5D5391EE-6293-5AA7-A8D3-20EAD0A2D60D}" dt="2026-03-31T15:42:22.297" v="83" actId="1076"/>
+          <ac:spMkLst>
+            <pc:docMk/>
+            <pc:sldMk cId="3292860451" sldId="414"/>
+            <ac:spMk id="8" creationId="{A96D0492-12E9-AFDE-0697-8D4D5FCFFA3C}"/>
+          </ac:spMkLst>
+        </pc:spChg>
+      </pc:sldChg>
+      <pc:sldChg chg="add del ord">
+        <pc:chgData name="DeMayo, Justin" userId="24cad3b6-f367-43ab-8aca-9f442ba0355f" providerId="ADAL" clId="{5D5391EE-6293-5AA7-A8D3-20EAD0A2D60D}" dt="2026-03-27T15:21:47.123" v="3" actId="20578"/>
+        <pc:sldMkLst>
+          <pc:docMk/>
+          <pc:sldMk cId="3265380985" sldId="424"/>
+        </pc:sldMkLst>
+      </pc:sldChg>
+      <pc:sldChg chg="addSp modSp add mod ord">
+        <pc:chgData name="DeMayo, Justin" userId="24cad3b6-f367-43ab-8aca-9f442ba0355f" providerId="ADAL" clId="{5D5391EE-6293-5AA7-A8D3-20EAD0A2D60D}" dt="2026-03-27T15:29:20.354" v="82" actId="1076"/>
+        <pc:sldMkLst>
+          <pc:docMk/>
+          <pc:sldMk cId="0" sldId="443"/>
+        </pc:sldMkLst>
+        <pc:spChg chg="mod">
+          <ac:chgData name="DeMayo, Justin" userId="24cad3b6-f367-43ab-8aca-9f442ba0355f" providerId="ADAL" clId="{5D5391EE-6293-5AA7-A8D3-20EAD0A2D60D}" dt="2026-03-27T15:29:13.581" v="81" actId="14100"/>
+          <ac:spMkLst>
+            <pc:docMk/>
+            <pc:sldMk cId="0" sldId="443"/>
+            <ac:spMk id="2" creationId="{00000000-0000-0000-0000-000000000000}"/>
+          </ac:spMkLst>
+        </pc:spChg>
+        <pc:spChg chg="mod">
+          <ac:chgData name="DeMayo, Justin" userId="24cad3b6-f367-43ab-8aca-9f442ba0355f" providerId="ADAL" clId="{5D5391EE-6293-5AA7-A8D3-20EAD0A2D60D}" dt="2026-03-27T15:29:08.892" v="79" actId="1076"/>
+          <ac:spMkLst>
+            <pc:docMk/>
+            <pc:sldMk cId="0" sldId="443"/>
+            <ac:spMk id="4" creationId="{00000000-0000-0000-0000-000000000000}"/>
+          </ac:spMkLst>
+        </pc:spChg>
+        <pc:spChg chg="mod">
+          <ac:chgData name="DeMayo, Justin" userId="24cad3b6-f367-43ab-8aca-9f442ba0355f" providerId="ADAL" clId="{5D5391EE-6293-5AA7-A8D3-20EAD0A2D60D}" dt="2026-03-27T15:29:00.267" v="77" actId="1076"/>
+          <ac:spMkLst>
+            <pc:docMk/>
+            <pc:sldMk cId="0" sldId="443"/>
+            <ac:spMk id="5" creationId="{00000000-0000-0000-0000-000000000000}"/>
+          </ac:spMkLst>
+        </pc:spChg>
+        <pc:spChg chg="mod">
+          <ac:chgData name="DeMayo, Justin" userId="24cad3b6-f367-43ab-8aca-9f442ba0355f" providerId="ADAL" clId="{5D5391EE-6293-5AA7-A8D3-20EAD0A2D60D}" dt="2026-03-27T15:29:20.354" v="82" actId="1076"/>
+          <ac:spMkLst>
+            <pc:docMk/>
+            <pc:sldMk cId="0" sldId="443"/>
+            <ac:spMk id="6" creationId="{00000000-0000-0000-0000-000000000000}"/>
+          </ac:spMkLst>
+        </pc:spChg>
+        <pc:spChg chg="mod">
+          <ac:chgData name="DeMayo, Justin" userId="24cad3b6-f367-43ab-8aca-9f442ba0355f" providerId="ADAL" clId="{5D5391EE-6293-5AA7-A8D3-20EAD0A2D60D}" dt="2026-03-27T15:25:30.074" v="6" actId="14100"/>
+          <ac:spMkLst>
+            <pc:docMk/>
+            <pc:sldMk cId="0" sldId="443"/>
+            <ac:spMk id="7" creationId="{00000000-0000-0000-0000-000000000000}"/>
+          </ac:spMkLst>
+        </pc:spChg>
+        <pc:spChg chg="mod">
+          <ac:chgData name="DeMayo, Justin" userId="24cad3b6-f367-43ab-8aca-9f442ba0355f" providerId="ADAL" clId="{5D5391EE-6293-5AA7-A8D3-20EAD0A2D60D}" dt="2026-03-27T15:25:30.074" v="6" actId="14100"/>
+          <ac:spMkLst>
+            <pc:docMk/>
+            <pc:sldMk cId="0" sldId="443"/>
+            <ac:spMk id="8" creationId="{00000000-0000-0000-0000-000000000000}"/>
+          </ac:spMkLst>
+        </pc:spChg>
+        <pc:spChg chg="mod">
+          <ac:chgData name="DeMayo, Justin" userId="24cad3b6-f367-43ab-8aca-9f442ba0355f" providerId="ADAL" clId="{5D5391EE-6293-5AA7-A8D3-20EAD0A2D60D}" dt="2026-03-27T15:25:30.074" v="6" actId="14100"/>
+          <ac:spMkLst>
+            <pc:docMk/>
+            <pc:sldMk cId="0" sldId="443"/>
+            <ac:spMk id="9" creationId="{00000000-0000-0000-0000-000000000000}"/>
+          </ac:spMkLst>
+        </pc:spChg>
+        <pc:spChg chg="mod">
+          <ac:chgData name="DeMayo, Justin" userId="24cad3b6-f367-43ab-8aca-9f442ba0355f" providerId="ADAL" clId="{5D5391EE-6293-5AA7-A8D3-20EAD0A2D60D}" dt="2026-03-27T15:26:47.213" v="16" actId="1076"/>
+          <ac:spMkLst>
+            <pc:docMk/>
+            <pc:sldMk cId="0" sldId="443"/>
+            <ac:spMk id="10" creationId="{00000000-0000-0000-0000-000000000000}"/>
+          </ac:spMkLst>
+        </pc:spChg>
+        <pc:spChg chg="mod">
+          <ac:chgData name="DeMayo, Justin" userId="24cad3b6-f367-43ab-8aca-9f442ba0355f" providerId="ADAL" clId="{5D5391EE-6293-5AA7-A8D3-20EAD0A2D60D}" dt="2026-03-27T15:26:47.213" v="16" actId="1076"/>
+          <ac:spMkLst>
+            <pc:docMk/>
+            <pc:sldMk cId="0" sldId="443"/>
+            <ac:spMk id="11" creationId="{00000000-0000-0000-0000-000000000000}"/>
+          </ac:spMkLst>
+        </pc:spChg>
+        <pc:spChg chg="mod">
+          <ac:chgData name="DeMayo, Justin" userId="24cad3b6-f367-43ab-8aca-9f442ba0355f" providerId="ADAL" clId="{5D5391EE-6293-5AA7-A8D3-20EAD0A2D60D}" dt="2026-03-27T15:26:47.213" v="16" actId="1076"/>
+          <ac:spMkLst>
+            <pc:docMk/>
+            <pc:sldMk cId="0" sldId="443"/>
+            <ac:spMk id="12" creationId="{00000000-0000-0000-0000-000000000000}"/>
+          </ac:spMkLst>
+        </pc:spChg>
+        <pc:spChg chg="mod">
+          <ac:chgData name="DeMayo, Justin" userId="24cad3b6-f367-43ab-8aca-9f442ba0355f" providerId="ADAL" clId="{5D5391EE-6293-5AA7-A8D3-20EAD0A2D60D}" dt="2026-03-27T15:26:18.659" v="14" actId="1076"/>
+          <ac:spMkLst>
+            <pc:docMk/>
+            <pc:sldMk cId="0" sldId="443"/>
+            <ac:spMk id="13" creationId="{00000000-0000-0000-0000-000000000000}"/>
+          </ac:spMkLst>
+        </pc:spChg>
+        <pc:spChg chg="mod">
+          <ac:chgData name="DeMayo, Justin" userId="24cad3b6-f367-43ab-8aca-9f442ba0355f" providerId="ADAL" clId="{5D5391EE-6293-5AA7-A8D3-20EAD0A2D60D}" dt="2026-03-27T15:26:18.659" v="14" actId="1076"/>
+          <ac:spMkLst>
+            <pc:docMk/>
+            <pc:sldMk cId="0" sldId="443"/>
+            <ac:spMk id="14" creationId="{00000000-0000-0000-0000-000000000000}"/>
+          </ac:spMkLst>
+        </pc:spChg>
+        <pc:spChg chg="mod">
+          <ac:chgData name="DeMayo, Justin" userId="24cad3b6-f367-43ab-8aca-9f442ba0355f" providerId="ADAL" clId="{5D5391EE-6293-5AA7-A8D3-20EAD0A2D60D}" dt="2026-03-27T15:26:18.659" v="14" actId="1076"/>
+          <ac:spMkLst>
+            <pc:docMk/>
+            <pc:sldMk cId="0" sldId="443"/>
+            <ac:spMk id="15" creationId="{00000000-0000-0000-0000-000000000000}"/>
+          </ac:spMkLst>
+        </pc:spChg>
+        <pc:spChg chg="add mod">
+          <ac:chgData name="DeMayo, Justin" userId="24cad3b6-f367-43ab-8aca-9f442ba0355f" providerId="ADAL" clId="{5D5391EE-6293-5AA7-A8D3-20EAD0A2D60D}" dt="2026-03-27T15:26:34.906" v="15" actId="1076"/>
+          <ac:spMkLst>
+            <pc:docMk/>
+            <pc:sldMk cId="0" sldId="443"/>
+            <ac:spMk id="18" creationId="{DE14D25F-912B-3C83-2A8F-789A598A86FE}"/>
+          </ac:spMkLst>
+        </pc:spChg>
+        <pc:spChg chg="add mod">
+          <ac:chgData name="DeMayo, Justin" userId="24cad3b6-f367-43ab-8aca-9f442ba0355f" providerId="ADAL" clId="{5D5391EE-6293-5AA7-A8D3-20EAD0A2D60D}" dt="2026-03-27T15:27:39.236" v="70" actId="20577"/>
+          <ac:spMkLst>
+            <pc:docMk/>
+            <pc:sldMk cId="0" sldId="443"/>
+            <ac:spMk id="19" creationId="{85F75BCE-95B8-9093-86A5-962E1734C239}"/>
+          </ac:spMkLst>
+        </pc:spChg>
+        <pc:spChg chg="add mod">
+          <ac:chgData name="DeMayo, Justin" userId="24cad3b6-f367-43ab-8aca-9f442ba0355f" providerId="ADAL" clId="{5D5391EE-6293-5AA7-A8D3-20EAD0A2D60D}" dt="2026-03-27T15:28:27.380" v="73" actId="20577"/>
+          <ac:spMkLst>
+            <pc:docMk/>
+            <pc:sldMk cId="0" sldId="443"/>
+            <ac:spMk id="20" creationId="{A3F738C4-3FBF-9DCB-6481-CA4901E466C9}"/>
+          </ac:spMkLst>
+        </pc:spChg>
+      </pc:sldChg>
+    </pc:docChg>
+  </pc:docChgLst>
+  <pc:docChgLst>
     <pc:chgData name="Wegener, Maximilian" userId="00319a47-5df7-4a7f-b5fd-8c1aef3f7443" providerId="ADAL" clId="{CF2CAE99-D8F5-51A4-A68C-79C1C32033F6}"/>
     <pc:docChg chg="undo custSel addSld delSld modSld sldOrd">
-      <pc:chgData name="Wegener, Maximilian" userId="00319a47-5df7-4a7f-b5fd-8c1aef3f7443" providerId="ADAL" clId="{CF2CAE99-D8F5-51A4-A68C-79C1C32033F6}" dt="2026-03-18T14:01:43.175" v="5826" actId="20577"/>
+      <pc:chgData name="Wegener, Maximilian" userId="00319a47-5df7-4a7f-b5fd-8c1aef3f7443" providerId="ADAL" clId="{CF2CAE99-D8F5-51A4-A68C-79C1C32033F6}" dt="2026-04-01T17:29:54.105" v="5827" actId="13926"/>
       <pc:docMkLst>
         <pc:docMk/>
       </pc:docMkLst>
@@ -298,17 +467,9 @@
           <pc:docMk/>
           <pc:sldMk cId="3265380985" sldId="424"/>
         </pc:sldMkLst>
-        <pc:spChg chg="add mod">
-          <ac:chgData name="Wegener, Maximilian" userId="00319a47-5df7-4a7f-b5fd-8c1aef3f7443" providerId="ADAL" clId="{CF2CAE99-D8F5-51A4-A68C-79C1C32033F6}" dt="2026-03-06T21:09:02.441" v="938" actId="313"/>
-          <ac:spMkLst>
-            <pc:docMk/>
-            <pc:sldMk cId="3265380985" sldId="424"/>
-            <ac:spMk id="2" creationId="{40FBC506-323A-713D-5F7A-4FE5BA82D151}"/>
-          </ac:spMkLst>
-        </pc:spChg>
       </pc:sldChg>
       <pc:sldChg chg="addSp delSp modSp new mod">
-        <pc:chgData name="Wegener, Maximilian" userId="00319a47-5df7-4a7f-b5fd-8c1aef3f7443" providerId="ADAL" clId="{CF2CAE99-D8F5-51A4-A68C-79C1C32033F6}" dt="2026-03-06T20:43:09.007" v="250" actId="1038"/>
+        <pc:chgData name="Wegener, Maximilian" userId="00319a47-5df7-4a7f-b5fd-8c1aef3f7443" providerId="ADAL" clId="{CF2CAE99-D8F5-51A4-A68C-79C1C32033F6}" dt="2026-04-01T17:29:54.105" v="5827" actId="13926"/>
         <pc:sldMkLst>
           <pc:docMk/>
           <pc:sldMk cId="3603648942" sldId="426"/>
@@ -338,7 +499,7 @@
           </ac:spMkLst>
         </pc:spChg>
         <pc:spChg chg="add mod">
-          <ac:chgData name="Wegener, Maximilian" userId="00319a47-5df7-4a7f-b5fd-8c1aef3f7443" providerId="ADAL" clId="{CF2CAE99-D8F5-51A4-A68C-79C1C32033F6}" dt="2026-03-06T20:42:35.623" v="225" actId="1076"/>
+          <ac:chgData name="Wegener, Maximilian" userId="00319a47-5df7-4a7f-b5fd-8c1aef3f7443" providerId="ADAL" clId="{CF2CAE99-D8F5-51A4-A68C-79C1C32033F6}" dt="2026-04-01T17:29:54.105" v="5827" actId="13926"/>
           <ac:spMkLst>
             <pc:docMk/>
             <pc:sldMk cId="3603648942" sldId="426"/>
@@ -491,14 +652,6 @@
           <pc:docMk/>
           <pc:sldMk cId="2724629737" sldId="434"/>
         </pc:sldMkLst>
-        <pc:spChg chg="del mod">
-          <ac:chgData name="Wegener, Maximilian" userId="00319a47-5df7-4a7f-b5fd-8c1aef3f7443" providerId="ADAL" clId="{CF2CAE99-D8F5-51A4-A68C-79C1C32033F6}" dt="2026-03-17T13:42:10.968" v="5419" actId="478"/>
-          <ac:spMkLst>
-            <pc:docMk/>
-            <pc:sldMk cId="2724629737" sldId="434"/>
-            <ac:spMk id="2" creationId="{0A0AD051-9697-62EB-99FA-AA5D30C88F6C}"/>
-          </ac:spMkLst>
-        </pc:spChg>
         <pc:spChg chg="mod">
           <ac:chgData name="Wegener, Maximilian" userId="00319a47-5df7-4a7f-b5fd-8c1aef3f7443" providerId="ADAL" clId="{CF2CAE99-D8F5-51A4-A68C-79C1C32033F6}" dt="2026-03-17T15:06:30.304" v="5479" actId="20577"/>
           <ac:spMkLst>
@@ -516,27 +669,11 @@
           </ac:spMkLst>
         </pc:spChg>
         <pc:spChg chg="add del mod">
-          <ac:chgData name="Wegener, Maximilian" userId="00319a47-5df7-4a7f-b5fd-8c1aef3f7443" providerId="ADAL" clId="{CF2CAE99-D8F5-51A4-A68C-79C1C32033F6}" dt="2026-03-17T13:42:20.282" v="5421" actId="478"/>
-          <ac:spMkLst>
-            <pc:docMk/>
-            <pc:sldMk cId="2724629737" sldId="434"/>
-            <ac:spMk id="7" creationId="{0F5E2739-263C-8EBA-EAA5-4ADCF6FF2200}"/>
-          </ac:spMkLst>
-        </pc:spChg>
-        <pc:spChg chg="add del mod">
           <ac:chgData name="Wegener, Maximilian" userId="00319a47-5df7-4a7f-b5fd-8c1aef3f7443" providerId="ADAL" clId="{CF2CAE99-D8F5-51A4-A68C-79C1C32033F6}" dt="2026-03-17T15:12:58.692" v="5547" actId="47"/>
           <ac:spMkLst>
             <pc:docMk/>
             <pc:sldMk cId="2724629737" sldId="434"/>
             <ac:spMk id="8" creationId="{263E7C6D-F391-DA84-88A3-422F3F19A479}"/>
-          </ac:spMkLst>
-        </pc:spChg>
-        <pc:spChg chg="add del mod">
-          <ac:chgData name="Wegener, Maximilian" userId="00319a47-5df7-4a7f-b5fd-8c1aef3f7443" providerId="ADAL" clId="{CF2CAE99-D8F5-51A4-A68C-79C1C32033F6}" dt="2026-03-17T15:18:28.933" v="5560" actId="478"/>
-          <ac:spMkLst>
-            <pc:docMk/>
-            <pc:sldMk cId="2724629737" sldId="434"/>
-            <ac:spMk id="9" creationId="{90F8BDE7-2C41-1681-3B72-7642A4CBB04D}"/>
           </ac:spMkLst>
         </pc:spChg>
       </pc:sldChg>
@@ -575,38 +712,6 @@
             <pc:docMk/>
             <pc:sldMk cId="727022196" sldId="437"/>
             <ac:spMk id="3" creationId="{14B51679-0775-CD5C-A896-7D2AAB7822B0}"/>
-          </ac:spMkLst>
-        </pc:spChg>
-        <pc:spChg chg="del">
-          <ac:chgData name="Wegener, Maximilian" userId="00319a47-5df7-4a7f-b5fd-8c1aef3f7443" providerId="ADAL" clId="{CF2CAE99-D8F5-51A4-A68C-79C1C32033F6}" dt="2026-03-18T13:54:42.949" v="5681" actId="478"/>
-          <ac:spMkLst>
-            <pc:docMk/>
-            <pc:sldMk cId="727022196" sldId="437"/>
-            <ac:spMk id="4" creationId="{4DA8DD31-DD82-BF9B-173D-2AAAEB5617D1}"/>
-          </ac:spMkLst>
-        </pc:spChg>
-        <pc:spChg chg="del mod">
-          <ac:chgData name="Wegener, Maximilian" userId="00319a47-5df7-4a7f-b5fd-8c1aef3f7443" providerId="ADAL" clId="{CF2CAE99-D8F5-51A4-A68C-79C1C32033F6}" dt="2026-03-18T13:55:05.644" v="5687" actId="478"/>
-          <ac:spMkLst>
-            <pc:docMk/>
-            <pc:sldMk cId="727022196" sldId="437"/>
-            <ac:spMk id="6" creationId="{4156A072-4103-570C-2FC1-7D9050CB9F4B}"/>
-          </ac:spMkLst>
-        </pc:spChg>
-        <pc:spChg chg="del mod">
-          <ac:chgData name="Wegener, Maximilian" userId="00319a47-5df7-4a7f-b5fd-8c1aef3f7443" providerId="ADAL" clId="{CF2CAE99-D8F5-51A4-A68C-79C1C32033F6}" dt="2026-03-18T13:55:01.263" v="5685" actId="478"/>
-          <ac:spMkLst>
-            <pc:docMk/>
-            <pc:sldMk cId="727022196" sldId="437"/>
-            <ac:spMk id="7" creationId="{A6FB7224-F318-F818-6B05-973D8D675824}"/>
-          </ac:spMkLst>
-        </pc:spChg>
-        <pc:spChg chg="add del mod">
-          <ac:chgData name="Wegener, Maximilian" userId="00319a47-5df7-4a7f-b5fd-8c1aef3f7443" providerId="ADAL" clId="{CF2CAE99-D8F5-51A4-A68C-79C1C32033F6}" dt="2026-03-18T13:54:44.945" v="5682" actId="478"/>
-          <ac:spMkLst>
-            <pc:docMk/>
-            <pc:sldMk cId="727022196" sldId="437"/>
-            <ac:spMk id="8" creationId="{0018217C-8E03-4A82-D5FF-60DC4CC30B43}"/>
           </ac:spMkLst>
         </pc:spChg>
         <pc:spChg chg="add mod">
@@ -688,6 +793,53 @@
       </pc:sldChg>
     </pc:docChg>
   </pc:docChgLst>
+  <pc:docChgLst>
+    <pc:chgData name="DeMayo, Justin" userId="S::justin.demayo@yale.edu::24cad3b6-f367-43ab-8aca-9f442ba0355f" providerId="AD" clId="Web-{133D303A-33D7-B9D3-F094-B9E6A8DA8782}"/>
+    <pc:docChg chg="addSld delSld modSld sldOrd">
+      <pc:chgData name="DeMayo, Justin" userId="S::justin.demayo@yale.edu::24cad3b6-f367-43ab-8aca-9f442ba0355f" providerId="AD" clId="Web-{133D303A-33D7-B9D3-F094-B9E6A8DA8782}" dt="2026-03-27T15:20:33.410" v="10"/>
+      <pc:docMkLst>
+        <pc:docMk/>
+      </pc:docMkLst>
+      <pc:sldChg chg="addSp delSp modSp">
+        <pc:chgData name="DeMayo, Justin" userId="S::justin.demayo@yale.edu::24cad3b6-f367-43ab-8aca-9f442ba0355f" providerId="AD" clId="Web-{133D303A-33D7-B9D3-F094-B9E6A8DA8782}" dt="2026-03-27T15:19:31.517" v="4"/>
+        <pc:sldMkLst>
+          <pc:docMk/>
+          <pc:sldMk cId="3265380985" sldId="424"/>
+        </pc:sldMkLst>
+      </pc:sldChg>
+    </pc:docChg>
+  </pc:docChgLst>
+  <pc:docChgLst>
+    <pc:chgData name="DeMayo, Justin" userId="S::justin.demayo@yale.edu::24cad3b6-f367-43ab-8aca-9f442ba0355f" providerId="AD" clId="Web-{0231E3A9-0848-9C92-903B-E22E929E49D7}"/>
+    <pc:docChg chg="addSld delSld modSld">
+      <pc:chgData name="DeMayo, Justin" userId="S::justin.demayo@yale.edu::24cad3b6-f367-43ab-8aca-9f442ba0355f" providerId="AD" clId="Web-{0231E3A9-0848-9C92-903B-E22E929E49D7}" dt="2026-03-30T15:25:16.718" v="6"/>
+      <pc:docMkLst>
+        <pc:docMk/>
+      </pc:docMkLst>
+      <pc:sldChg chg="add">
+        <pc:chgData name="DeMayo, Justin" userId="S::justin.demayo@yale.edu::24cad3b6-f367-43ab-8aca-9f442ba0355f" providerId="AD" clId="Web-{0231E3A9-0848-9C92-903B-E22E929E49D7}" dt="2026-03-30T15:18:06.162" v="1"/>
+        <pc:sldMkLst>
+          <pc:docMk/>
+          <pc:sldMk cId="2156390896" sldId="445"/>
+        </pc:sldMkLst>
+      </pc:sldChg>
+      <pc:sldChg chg="addSp modSp new">
+        <pc:chgData name="DeMayo, Justin" userId="S::justin.demayo@yale.edu::24cad3b6-f367-43ab-8aca-9f442ba0355f" providerId="AD" clId="Web-{0231E3A9-0848-9C92-903B-E22E929E49D7}" dt="2026-03-30T15:25:16.718" v="6"/>
+        <pc:sldMkLst>
+          <pc:docMk/>
+          <pc:sldMk cId="2087536791" sldId="446"/>
+        </pc:sldMkLst>
+        <pc:picChg chg="add mod">
+          <ac:chgData name="DeMayo, Justin" userId="S::justin.demayo@yale.edu::24cad3b6-f367-43ab-8aca-9f442ba0355f" providerId="AD" clId="Web-{0231E3A9-0848-9C92-903B-E22E929E49D7}" dt="2026-03-30T15:25:16.718" v="6"/>
+          <ac:picMkLst>
+            <pc:docMk/>
+            <pc:sldMk cId="2087536791" sldId="446"/>
+            <ac:picMk id="3" creationId="{CADBC4C9-D448-2750-A852-4993872F2D72}"/>
+          </ac:picMkLst>
+        </pc:picChg>
+      </pc:sldChg>
+    </pc:docChg>
+  </pc:docChgLst>
 </pc:chgInfo>
 </file>
 
@@ -773,7 +925,7 @@
           <a:p>
             <a:fld id="{F0B8440E-8C35-1142-93FC-F32DCB9C4FDA}" type="datetimeFigureOut">
               <a:rPr lang="en-US" smtClean="0"/>
-              <a:t>3/18/26</a:t>
+              <a:t>4/1/26</a:t>
             </a:fld>
             <a:endParaRPr lang="en-US"/>
           </a:p>
@@ -2554,6 +2706,93 @@
   <p:cSld>
     <p:spTree>
       <p:nvGrpSpPr>
+        <p:cNvPr id="1" name=""/>
+        <p:cNvGrpSpPr/>
+        <p:nvPr/>
+      </p:nvGrpSpPr>
+      <p:grpSpPr>
+        <a:xfrm>
+          <a:off x="0" y="0"/>
+          <a:ext cx="0" cy="0"/>
+          <a:chOff x="0" y="0"/>
+          <a:chExt cx="0" cy="0"/>
+        </a:xfrm>
+      </p:grpSpPr>
+      <p:sp>
+        <p:nvSpPr>
+          <p:cNvPr id="2" name="Slide Image Placeholder 1"/>
+          <p:cNvSpPr>
+            <a:spLocks noGrp="1" noRot="1" noChangeAspect="1"/>
+          </p:cNvSpPr>
+          <p:nvPr>
+            <p:ph type="sldImg"/>
+          </p:nvPr>
+        </p:nvSpPr>
+        <p:spPr/>
+      </p:sp>
+      <p:sp>
+        <p:nvSpPr>
+          <p:cNvPr id="3" name="Notes Placeholder 2"/>
+          <p:cNvSpPr>
+            <a:spLocks noGrp="1"/>
+          </p:cNvSpPr>
+          <p:nvPr>
+            <p:ph type="body" idx="1"/>
+          </p:nvPr>
+        </p:nvSpPr>
+        <p:spPr/>
+        <p:txBody>
+          <a:bodyPr/>
+          <a:lstStyle/>
+          <a:p>
+            <a:r>
+              <a:rPr lang="en-US"/>
+              <a:t>- Also note, there are many other plugins, and coding agents can be installed as plugins and possible stand alone desktop applications.</a:t>
+            </a:r>
+          </a:p>
+        </p:txBody>
+      </p:sp>
+      <p:sp>
+        <p:nvSpPr>
+          <p:cNvPr id="4" name="Slide Number Placeholder 3"/>
+          <p:cNvSpPr>
+            <a:spLocks noGrp="1"/>
+          </p:cNvSpPr>
+          <p:nvPr>
+            <p:ph type="sldNum" sz="quarter" idx="5"/>
+          </p:nvPr>
+        </p:nvSpPr>
+        <p:spPr/>
+        <p:txBody>
+          <a:bodyPr/>
+          <a:lstStyle/>
+          <a:p>
+            <a:fld id="{A5B4ED3A-914E-6443-A2E7-C28A873C6BCA}" type="slidenum">
+              <a:rPr lang="en-US" smtClean="0"/>
+              <a:t>24</a:t>
+            </a:fld>
+            <a:endParaRPr lang="en-US"/>
+          </a:p>
+        </p:txBody>
+      </p:sp>
+    </p:spTree>
+    <p:extLst>
+      <p:ext uri="{BB962C8B-B14F-4D97-AF65-F5344CB8AC3E}">
+        <p14:creationId xmlns:p14="http://schemas.microsoft.com/office/powerpoint/2010/main" val="3859400155"/>
+      </p:ext>
+    </p:extLst>
+  </p:cSld>
+  <p:clrMapOvr>
+    <a:masterClrMapping/>
+  </p:clrMapOvr>
+</p:notes>
+</file>
+
+<file path=ppt/notesSlides/notesSlide24.xml><?xml version="1.0" encoding="utf-8"?>
+<p:notes xmlns:a="http://schemas.openxmlformats.org/drawingml/2006/main" xmlns:r="http://schemas.openxmlformats.org/officeDocument/2006/relationships" xmlns:p="http://schemas.openxmlformats.org/presentationml/2006/main">
+  <p:cSld>
+    <p:spTree>
+      <p:nvGrpSpPr>
         <p:cNvPr id="1" name="">
           <a:extLst>
             <a:ext uri="{FF2B5EF4-FFF2-40B4-BE49-F238E27FC236}">
@@ -2638,7 +2877,7 @@
           <a:p>
             <a:fld id="{50049E44-D13C-C54E-8DA3-DB5207EAD25C}" type="slidenum">
               <a:rPr lang="en-US" smtClean="0"/>
-              <a:t>23</a:t>
+              <a:t>26</a:t>
             </a:fld>
             <a:endParaRPr lang="en-US"/>
           </a:p>
@@ -2657,7 +2896,7 @@
 </p:notes>
 </file>
 
-<file path=ppt/notesSlides/notesSlide24.xml><?xml version="1.0" encoding="utf-8"?>
+<file path=ppt/notesSlides/notesSlide25.xml><?xml version="1.0" encoding="utf-8"?>
 <p:notes xmlns:a="http://schemas.openxmlformats.org/drawingml/2006/main" xmlns:r="http://schemas.openxmlformats.org/officeDocument/2006/relationships" xmlns:p="http://schemas.openxmlformats.org/presentationml/2006/main">
   <p:cSld>
     <p:spTree>
@@ -2722,7 +2961,7 @@
           <a:p>
             <a:fld id="{A5B4ED3A-914E-6443-A2E7-C28A873C6BCA}" type="slidenum">
               <a:rPr lang="en-US" smtClean="0"/>
-              <a:t>24</a:t>
+              <a:t>27</a:t>
             </a:fld>
             <a:endParaRPr lang="en-US"/>
           </a:p>
@@ -2741,7 +2980,7 @@
 </p:notes>
 </file>
 
-<file path=ppt/notesSlides/notesSlide25.xml><?xml version="1.0" encoding="utf-8"?>
+<file path=ppt/notesSlides/notesSlide26.xml><?xml version="1.0" encoding="utf-8"?>
 <p:notes xmlns:a="http://schemas.openxmlformats.org/drawingml/2006/main" xmlns:r="http://schemas.openxmlformats.org/officeDocument/2006/relationships" xmlns:p="http://schemas.openxmlformats.org/presentationml/2006/main">
   <p:cSld>
     <p:spTree>
@@ -2830,7 +3069,7 @@
           <a:p>
             <a:fld id="{A5B4ED3A-914E-6443-A2E7-C28A873C6BCA}" type="slidenum">
               <a:rPr lang="en-US" smtClean="0"/>
-              <a:t>25</a:t>
+              <a:t>28</a:t>
             </a:fld>
             <a:endParaRPr lang="en-US"/>
           </a:p>
@@ -12758,17 +12997,12 @@
             </a:r>
             <a:r>
               <a:rPr lang="en-US" sz="3600" dirty="0" err="1">
-                <a:highlight>
-                  <a:srgbClr val="FFFF00"/>
-                </a:highlight>
                 <a:latin typeface="YaleNew" panose="02000602050000020003" pitchFamily="2" charset="77"/>
+                <a:hlinkClick r:id="rId5"/>
               </a:rPr>
               <a:t>Github</a:t>
             </a:r>
             <a:endParaRPr lang="en-US" sz="3600" dirty="0">
-              <a:highlight>
-                <a:srgbClr val="FFFF00"/>
-              </a:highlight>
               <a:latin typeface="YaleNew" panose="02000602050000020003" pitchFamily="2" charset="77"/>
             </a:endParaRPr>
           </a:p>
@@ -12789,7 +13023,7 @@
           <p:nvPr/>
         </p:nvPicPr>
         <p:blipFill>
-          <a:blip r:embed="rId5"/>
+          <a:blip r:embed="rId6"/>
           <a:stretch>
             <a:fillRect/>
           </a:stretch>
@@ -13491,7 +13725,7 @@
         <p:spPr>
           <a:xfrm>
             <a:off x="558799" y="1714500"/>
-            <a:ext cx="2717801" cy="1102251"/>
+            <a:ext cx="3072675" cy="1102251"/>
           </a:xfrm>
         </p:spPr>
         <p:txBody>
@@ -13504,7 +13738,15 @@
               <a:rPr lang="en-US" dirty="0">
                 <a:latin typeface="YaleNew" panose="02000602050000020003" pitchFamily="2" charset="77"/>
               </a:rPr>
-              <a:t>AI Agents Live demo</a:t>
+              <a:t>Beyond the Chatbot – </a:t>
+            </a:r>
+          </a:p>
+          <a:p>
+            <a:r>
+              <a:rPr lang="en-US" dirty="0">
+                <a:latin typeface="YaleNew" panose="02000602050000020003" pitchFamily="2" charset="77"/>
+              </a:rPr>
+              <a:t>AI Pair Programming</a:t>
             </a:r>
           </a:p>
         </p:txBody>
@@ -13540,10 +13782,10 @@
       </p:sp>
       <p:sp>
         <p:nvSpPr>
-          <p:cNvPr id="2" name="TextBox 1">
-            <a:extLst>
-              <a:ext uri="{FF2B5EF4-FFF2-40B4-BE49-F238E27FC236}">
-                <a16:creationId xmlns:a16="http://schemas.microsoft.com/office/drawing/2014/main" id="{40FBC506-323A-713D-5F7A-4FE5BA82D151}"/>
+          <p:cNvPr id="4" name="TextBox 3">
+            <a:extLst>
+              <a:ext uri="{FF2B5EF4-FFF2-40B4-BE49-F238E27FC236}">
+                <a16:creationId xmlns:a16="http://schemas.microsoft.com/office/drawing/2014/main" id="{AD1FE2B4-411E-F57C-7D45-A7EA417827E6}"/>
               </a:ext>
             </a:extLst>
           </p:cNvPr>
@@ -13552,8 +13794,8 @@
         </p:nvSpPr>
         <p:spPr>
           <a:xfrm>
-            <a:off x="5478236" y="2245179"/>
-            <a:ext cx="2396682" cy="1477328"/>
+            <a:off x="4708635" y="354068"/>
+            <a:ext cx="5303520" cy="457200"/>
           </a:xfrm>
           <a:prstGeom prst="rect">
             <a:avLst/>
@@ -13561,41 +13803,465 @@
           <a:noFill/>
         </p:spPr>
         <p:txBody>
-          <a:bodyPr wrap="none" rtlCol="0">
+          <a:bodyPr wrap="square">
             <a:spAutoFit/>
           </a:bodyPr>
           <a:lstStyle/>
           <a:p>
-            <a:r>
-              <a:rPr lang="en-US" dirty="0"/>
-              <a:t>Justin</a:t>
-            </a:r>
-          </a:p>
-          <a:p>
-            <a:endParaRPr lang="en-US" dirty="0"/>
-          </a:p>
-          <a:p>
-            <a:r>
-              <a:rPr lang="en-US" dirty="0"/>
-              <a:t>Sign into copilot</a:t>
-            </a:r>
-          </a:p>
-          <a:p>
-            <a:endParaRPr lang="en-US" dirty="0"/>
-          </a:p>
-          <a:p>
-            <a:r>
-              <a:rPr lang="en-US" dirty="0"/>
-              <a:t>Add agents like </a:t>
-            </a:r>
-            <a:r>
-              <a:rPr lang="en-US" dirty="0" err="1"/>
-              <a:t>gemini</a:t>
-            </a:r>
-            <a:endParaRPr lang="en-US" dirty="0"/>
-          </a:p>
-        </p:txBody>
-      </p:sp>
+            <a:pPr algn="l"/>
+            <a:r>
+              <a:rPr sz="1800" b="1" dirty="0">
+                <a:solidFill>
+                  <a:srgbClr val="00356B"/>
+                </a:solidFill>
+              </a:rPr>
+              <a:t>The Core Shift</a:t>
+            </a:r>
+          </a:p>
+        </p:txBody>
+      </p:sp>
+      <p:sp>
+        <p:nvSpPr>
+          <p:cNvPr id="6" name="TextBox 5">
+            <a:extLst>
+              <a:ext uri="{FF2B5EF4-FFF2-40B4-BE49-F238E27FC236}">
+                <a16:creationId xmlns:a16="http://schemas.microsoft.com/office/drawing/2014/main" id="{9EB7E238-C9DA-435B-20EA-AFE65A061F1F}"/>
+              </a:ext>
+            </a:extLst>
+          </p:cNvPr>
+          <p:cNvSpPr txBox="1"/>
+          <p:nvPr/>
+        </p:nvSpPr>
+        <p:spPr>
+          <a:xfrm>
+            <a:off x="4679968" y="915451"/>
+            <a:ext cx="6083826" cy="1908215"/>
+          </a:xfrm>
+          <a:prstGeom prst="rect">
+            <a:avLst/>
+          </a:prstGeom>
+          <a:noFill/>
+        </p:spPr>
+        <p:txBody>
+          <a:bodyPr wrap="square">
+            <a:spAutoFit/>
+          </a:bodyPr>
+          <a:lstStyle/>
+          <a:p>
+            <a:pPr algn="l">
+              <a:spcBef>
+                <a:spcPts val="400"/>
+              </a:spcBef>
+            </a:pPr>
+            <a:r>
+              <a:rPr dirty="0">
+                <a:solidFill>
+                  <a:srgbClr val="333333"/>
+                </a:solidFill>
+              </a:rPr>
+              <a:t>▸  From Web to Workspace — natively embedded AI agents.</a:t>
+            </a:r>
+          </a:p>
+          <a:p>
+            <a:pPr algn="l">
+              <a:spcBef>
+                <a:spcPts val="400"/>
+              </a:spcBef>
+            </a:pPr>
+            <a:r>
+              <a:rPr dirty="0">
+                <a:solidFill>
+                  <a:srgbClr val="333333"/>
+                </a:solidFill>
+              </a:rPr>
+              <a:t>▸  Full Context Awareness — agents read your files, variables, and project structure.</a:t>
+            </a:r>
+          </a:p>
+          <a:p>
+            <a:pPr algn="l">
+              <a:spcBef>
+                <a:spcPts val="400"/>
+              </a:spcBef>
+            </a:pPr>
+            <a:r>
+              <a:rPr dirty="0">
+                <a:solidFill>
+                  <a:srgbClr val="333333"/>
+                </a:solidFill>
+              </a:rPr>
+              <a:t>▸  No copy-paste context-switching from browser to IDE.</a:t>
+            </a:r>
+          </a:p>
+          <a:p>
+            <a:pPr algn="l">
+              <a:spcBef>
+                <a:spcPts val="400"/>
+              </a:spcBef>
+            </a:pPr>
+            <a:r>
+              <a:rPr dirty="0">
+                <a:solidFill>
+                  <a:srgbClr val="333333"/>
+                </a:solidFill>
+              </a:rPr>
+              <a:t>▸  Expanding from Yale Clarity's secure web gateway → secure API / IDE integrations.</a:t>
+            </a:r>
+          </a:p>
+        </p:txBody>
+      </p:sp>
+      <p:sp>
+        <p:nvSpPr>
+          <p:cNvPr id="7" name="TextBox 6">
+            <a:extLst>
+              <a:ext uri="{FF2B5EF4-FFF2-40B4-BE49-F238E27FC236}">
+                <a16:creationId xmlns:a16="http://schemas.microsoft.com/office/drawing/2014/main" id="{4479C619-5B1E-3F23-9167-9F6022FA318A}"/>
+              </a:ext>
+            </a:extLst>
+          </p:cNvPr>
+          <p:cNvSpPr txBox="1"/>
+          <p:nvPr/>
+        </p:nvSpPr>
+        <p:spPr>
+          <a:xfrm>
+            <a:off x="4617195" y="3168869"/>
+            <a:ext cx="5486400" cy="369332"/>
+          </a:xfrm>
+          <a:prstGeom prst="rect">
+            <a:avLst/>
+          </a:prstGeom>
+          <a:noFill/>
+        </p:spPr>
+        <p:txBody>
+          <a:bodyPr wrap="square">
+            <a:spAutoFit/>
+          </a:bodyPr>
+          <a:lstStyle/>
+          <a:p>
+            <a:pPr algn="l"/>
+            <a:r>
+              <a:rPr lang="en-US" sz="1800" b="1" dirty="0">
+                <a:solidFill>
+                  <a:srgbClr val="00356B"/>
+                </a:solidFill>
+              </a:rPr>
+              <a:t>Chatbot </a:t>
+            </a:r>
+            <a:r>
+              <a:rPr sz="1800" b="1" dirty="0">
+                <a:solidFill>
+                  <a:srgbClr val="00356B"/>
+                </a:solidFill>
+              </a:rPr>
+              <a:t>vs.  </a:t>
+            </a:r>
+            <a:r>
+              <a:rPr lang="en-US" sz="1800" b="1" dirty="0">
+                <a:solidFill>
+                  <a:srgbClr val="00356B"/>
+                </a:solidFill>
+              </a:rPr>
+              <a:t>Coding</a:t>
+            </a:r>
+            <a:r>
+              <a:rPr sz="1800" b="1" dirty="0">
+                <a:solidFill>
+                  <a:srgbClr val="00356B"/>
+                </a:solidFill>
+              </a:rPr>
+              <a:t> Agent</a:t>
+            </a:r>
+          </a:p>
+        </p:txBody>
+      </p:sp>
+      <p:graphicFrame>
+        <p:nvGraphicFramePr>
+          <p:cNvPr id="8" name="Table 7">
+            <a:extLst>
+              <a:ext uri="{FF2B5EF4-FFF2-40B4-BE49-F238E27FC236}">
+                <a16:creationId xmlns:a16="http://schemas.microsoft.com/office/drawing/2014/main" id="{DC1EDFD1-C4CC-B257-A8A9-7D94B4CC0E92}"/>
+              </a:ext>
+            </a:extLst>
+          </p:cNvPr>
+          <p:cNvGraphicFramePr>
+            <a:graphicFrameLocks noGrp="1"/>
+          </p:cNvGraphicFramePr>
+          <p:nvPr/>
+        </p:nvGraphicFramePr>
+        <p:xfrm>
+          <a:off x="4617194" y="3580349"/>
+          <a:ext cx="6083826" cy="2926080"/>
+        </p:xfrm>
+        <a:graphic>
+          <a:graphicData uri="http://schemas.openxmlformats.org/drawingml/2006/table">
+            <a:tbl>
+              <a:tblPr firstRow="1" bandRow="1">
+                <a:tableStyleId>{5C22544A-7EE6-4342-B048-85BDC9FD1C3A}</a:tableStyleId>
+              </a:tblPr>
+              <a:tblGrid>
+                <a:gridCol w="3041913">
+                  <a:extLst>
+                    <a:ext uri="{9D8B030D-6E8A-4147-A177-3AD203B41FA5}">
+                      <a16:colId xmlns:a16="http://schemas.microsoft.com/office/drawing/2014/main" val="20000"/>
+                    </a:ext>
+                  </a:extLst>
+                </a:gridCol>
+                <a:gridCol w="3041913">
+                  <a:extLst>
+                    <a:ext uri="{9D8B030D-6E8A-4147-A177-3AD203B41FA5}">
+                      <a16:colId xmlns:a16="http://schemas.microsoft.com/office/drawing/2014/main" val="20001"/>
+                    </a:ext>
+                  </a:extLst>
+                </a:gridCol>
+              </a:tblGrid>
+              <a:tr h="585216">
+                <a:tc>
+                  <a:txBody>
+                    <a:bodyPr/>
+                    <a:lstStyle/>
+                    <a:p>
+                      <a:r>
+                        <a:rPr sz="1300" b="1">
+                          <a:solidFill>
+                            <a:srgbClr val="FFFFFF"/>
+                          </a:solidFill>
+                        </a:rPr>
+                        <a:t>Web Browser Chat</a:t>
+                      </a:r>
+                    </a:p>
+                  </a:txBody>
+                  <a:tcPr>
+                    <a:solidFill>
+                      <a:srgbClr val="00356B"/>
+                    </a:solidFill>
+                  </a:tcPr>
+                </a:tc>
+                <a:tc>
+                  <a:txBody>
+                    <a:bodyPr/>
+                    <a:lstStyle/>
+                    <a:p>
+                      <a:r>
+                        <a:rPr sz="1300" b="1" dirty="0">
+                          <a:solidFill>
+                            <a:srgbClr val="FFFFFF"/>
+                          </a:solidFill>
+                        </a:rPr>
+                        <a:t>IDE Agent (Copilot / Claude Code</a:t>
+                      </a:r>
+                      <a:r>
+                        <a:rPr lang="en-US" sz="1300" b="1" dirty="0">
+                          <a:solidFill>
+                            <a:srgbClr val="FFFFFF"/>
+                          </a:solidFill>
+                        </a:rPr>
+                        <a:t> / Positron Assistant</a:t>
+                      </a:r>
+                      <a:r>
+                        <a:rPr sz="1300" b="1" dirty="0">
+                          <a:solidFill>
+                            <a:srgbClr val="FFFFFF"/>
+                          </a:solidFill>
+                        </a:rPr>
+                        <a:t>)</a:t>
+                      </a:r>
+                    </a:p>
+                  </a:txBody>
+                  <a:tcPr>
+                    <a:solidFill>
+                      <a:srgbClr val="00356B"/>
+                    </a:solidFill>
+                  </a:tcPr>
+                </a:tc>
+                <a:extLst>
+                  <a:ext uri="{0D108BD9-81ED-4DB2-BD59-A6C34878D82A}">
+                    <a16:rowId xmlns:a16="http://schemas.microsoft.com/office/drawing/2014/main" val="10000"/>
+                  </a:ext>
+                </a:extLst>
+              </a:tr>
+              <a:tr h="585216">
+                <a:tc>
+                  <a:txBody>
+                    <a:bodyPr/>
+                    <a:lstStyle/>
+                    <a:p>
+                      <a:r>
+                        <a:rPr sz="1300" b="0">
+                          <a:solidFill>
+                            <a:srgbClr val="333333"/>
+                          </a:solidFill>
+                        </a:rPr>
+                        <a:t>You copy/paste code</a:t>
+                      </a:r>
+                    </a:p>
+                  </a:txBody>
+                  <a:tcPr/>
+                </a:tc>
+                <a:tc>
+                  <a:txBody>
+                    <a:bodyPr/>
+                    <a:lstStyle/>
+                    <a:p>
+                      <a:r>
+                        <a:rPr sz="1300" b="0" dirty="0">
+                          <a:solidFill>
+                            <a:srgbClr val="333333"/>
+                          </a:solidFill>
+                        </a:rPr>
+                        <a:t>Agent reads your open files directly</a:t>
+                      </a:r>
+                    </a:p>
+                  </a:txBody>
+                  <a:tcPr/>
+                </a:tc>
+                <a:extLst>
+                  <a:ext uri="{0D108BD9-81ED-4DB2-BD59-A6C34878D82A}">
+                    <a16:rowId xmlns:a16="http://schemas.microsoft.com/office/drawing/2014/main" val="10001"/>
+                  </a:ext>
+                </a:extLst>
+              </a:tr>
+              <a:tr h="585216">
+                <a:tc>
+                  <a:txBody>
+                    <a:bodyPr/>
+                    <a:lstStyle/>
+                    <a:p>
+                      <a:r>
+                        <a:rPr sz="1300" b="0">
+                          <a:solidFill>
+                            <a:srgbClr val="333333"/>
+                          </a:solidFill>
+                        </a:rPr>
+                        <a:t>No env awareness</a:t>
+                      </a:r>
+                    </a:p>
+                  </a:txBody>
+                  <a:tcPr>
+                    <a:solidFill>
+                      <a:srgbClr val="F2F2F2"/>
+                    </a:solidFill>
+                  </a:tcPr>
+                </a:tc>
+                <a:tc>
+                  <a:txBody>
+                    <a:bodyPr/>
+                    <a:lstStyle/>
+                    <a:p>
+                      <a:r>
+                        <a:rPr sz="1300" b="0">
+                          <a:solidFill>
+                            <a:srgbClr val="333333"/>
+                          </a:solidFill>
+                        </a:rPr>
+                        <a:t>Sees your loaded variables &amp; packages</a:t>
+                      </a:r>
+                    </a:p>
+                  </a:txBody>
+                  <a:tcPr>
+                    <a:solidFill>
+                      <a:srgbClr val="F2F2F2"/>
+                    </a:solidFill>
+                  </a:tcPr>
+                </a:tc>
+                <a:extLst>
+                  <a:ext uri="{0D108BD9-81ED-4DB2-BD59-A6C34878D82A}">
+                    <a16:rowId xmlns:a16="http://schemas.microsoft.com/office/drawing/2014/main" val="10002"/>
+                  </a:ext>
+                </a:extLst>
+              </a:tr>
+              <a:tr h="585216">
+                <a:tc>
+                  <a:txBody>
+                    <a:bodyPr/>
+                    <a:lstStyle/>
+                    <a:p>
+                      <a:r>
+                        <a:rPr sz="1300" b="0">
+                          <a:solidFill>
+                            <a:srgbClr val="333333"/>
+                          </a:solidFill>
+                        </a:rPr>
+                        <a:t>Manual error copy</a:t>
+                      </a:r>
+                    </a:p>
+                  </a:txBody>
+                  <a:tcPr/>
+                </a:tc>
+                <a:tc>
+                  <a:txBody>
+                    <a:bodyPr/>
+                    <a:lstStyle/>
+                    <a:p>
+                      <a:r>
+                        <a:rPr sz="1300" b="0">
+                          <a:solidFill>
+                            <a:srgbClr val="333333"/>
+                          </a:solidFill>
+                        </a:rPr>
+                        <a:t>Highlight error → instant fix in context</a:t>
+                      </a:r>
+                    </a:p>
+                  </a:txBody>
+                  <a:tcPr/>
+                </a:tc>
+                <a:extLst>
+                  <a:ext uri="{0D108BD9-81ED-4DB2-BD59-A6C34878D82A}">
+                    <a16:rowId xmlns:a16="http://schemas.microsoft.com/office/drawing/2014/main" val="10003"/>
+                  </a:ext>
+                </a:extLst>
+              </a:tr>
+              <a:tr h="585216">
+                <a:tc>
+                  <a:txBody>
+                    <a:bodyPr/>
+                    <a:lstStyle/>
+                    <a:p>
+                      <a:r>
+                        <a:rPr sz="1300" b="0" dirty="0">
+                          <a:solidFill>
+                            <a:srgbClr val="333333"/>
+                          </a:solidFill>
+                        </a:rPr>
+                        <a:t>One-shot Q&amp;A</a:t>
+                      </a:r>
+                    </a:p>
+                  </a:txBody>
+                  <a:tcPr>
+                    <a:solidFill>
+                      <a:srgbClr val="F2F2F2"/>
+                    </a:solidFill>
+                  </a:tcPr>
+                </a:tc>
+                <a:tc>
+                  <a:txBody>
+                    <a:bodyPr/>
+                    <a:lstStyle/>
+                    <a:p>
+                      <a:r>
+                        <a:rPr sz="1300" b="0" dirty="0">
+                          <a:solidFill>
+                            <a:srgbClr val="333333"/>
+                          </a:solidFill>
+                        </a:rPr>
+                        <a:t>Iterative pair-programming loop</a:t>
+                      </a:r>
+                    </a:p>
+                  </a:txBody>
+                  <a:tcPr>
+                    <a:solidFill>
+                      <a:srgbClr val="F2F2F2"/>
+                    </a:solidFill>
+                  </a:tcPr>
+                </a:tc>
+                <a:extLst>
+                  <a:ext uri="{0D108BD9-81ED-4DB2-BD59-A6C34878D82A}">
+                    <a16:rowId xmlns:a16="http://schemas.microsoft.com/office/drawing/2014/main" val="10004"/>
+                  </a:ext>
+                </a:extLst>
+              </a:tr>
+            </a:tbl>
+          </a:graphicData>
+        </a:graphic>
+      </p:graphicFrame>
     </p:spTree>
     <p:extLst>
       <p:ext uri="{BB962C8B-B14F-4D97-AF65-F5344CB8AC3E}">
@@ -13610,6 +14276,1526 @@
 </file>
 
 <file path=ppt/slides/slide23.xml><?xml version="1.0" encoding="utf-8"?>
+<p:sld xmlns:a="http://schemas.openxmlformats.org/drawingml/2006/main" xmlns:r="http://schemas.openxmlformats.org/officeDocument/2006/relationships" xmlns:p="http://schemas.openxmlformats.org/presentationml/2006/main">
+  <p:cSld>
+    <p:spTree>
+      <p:nvGrpSpPr>
+        <p:cNvPr id="1" name=""/>
+        <p:cNvGrpSpPr/>
+        <p:nvPr/>
+      </p:nvGrpSpPr>
+      <p:grpSpPr>
+        <a:xfrm>
+          <a:off x="0" y="0"/>
+          <a:ext cx="0" cy="0"/>
+          <a:chOff x="0" y="0"/>
+          <a:chExt cx="0" cy="0"/>
+        </a:xfrm>
+      </p:grpSpPr>
+      <p:sp>
+        <p:nvSpPr>
+          <p:cNvPr id="2" name="Rectangle 1"/>
+          <p:cNvSpPr/>
+          <p:nvPr/>
+        </p:nvSpPr>
+        <p:spPr>
+          <a:xfrm>
+            <a:off x="0" y="0"/>
+            <a:ext cx="12192000" cy="2001444"/>
+          </a:xfrm>
+          <a:prstGeom prst="rect">
+            <a:avLst/>
+          </a:prstGeom>
+          <a:solidFill>
+            <a:srgbClr val="00356B"/>
+          </a:solidFill>
+          <a:ln>
+            <a:noFill/>
+          </a:ln>
+        </p:spPr>
+        <p:style>
+          <a:lnRef idx="1">
+            <a:schemeClr val="accent1"/>
+          </a:lnRef>
+          <a:fillRef idx="3">
+            <a:schemeClr val="accent1"/>
+          </a:fillRef>
+          <a:effectRef idx="2">
+            <a:schemeClr val="accent1"/>
+          </a:effectRef>
+          <a:fontRef idx="minor">
+            <a:schemeClr val="lt1"/>
+          </a:fontRef>
+        </p:style>
+        <p:txBody>
+          <a:bodyPr rtlCol="0" anchor="ctr"/>
+          <a:lstStyle/>
+          <a:p>
+            <a:pPr algn="ctr"/>
+            <a:endParaRPr/>
+          </a:p>
+        </p:txBody>
+      </p:sp>
+      <p:sp>
+        <p:nvSpPr>
+          <p:cNvPr id="3" name="TextBox 2"/>
+          <p:cNvSpPr txBox="1"/>
+          <p:nvPr/>
+        </p:nvSpPr>
+        <p:spPr>
+          <a:xfrm>
+            <a:off x="274320" y="137160"/>
+            <a:ext cx="11430000" cy="523220"/>
+          </a:xfrm>
+          <a:prstGeom prst="rect">
+            <a:avLst/>
+          </a:prstGeom>
+          <a:noFill/>
+        </p:spPr>
+        <p:txBody>
+          <a:bodyPr wrap="square">
+            <a:spAutoFit/>
+          </a:bodyPr>
+          <a:lstStyle/>
+          <a:p>
+            <a:pPr algn="l"/>
+            <a:r>
+              <a:rPr sz="2800" b="1" dirty="0">
+                <a:solidFill>
+                  <a:srgbClr val="FFFFFF"/>
+                </a:solidFill>
+                <a:latin typeface="YaleNew" panose="02000602050000020003" pitchFamily="2" charset="77"/>
+              </a:rPr>
+              <a:t>The Academic Approach to AI Agents</a:t>
+            </a:r>
+          </a:p>
+        </p:txBody>
+      </p:sp>
+      <p:sp>
+        <p:nvSpPr>
+          <p:cNvPr id="4" name="TextBox 3"/>
+          <p:cNvSpPr txBox="1"/>
+          <p:nvPr/>
+        </p:nvSpPr>
+        <p:spPr>
+          <a:xfrm>
+            <a:off x="274320" y="586429"/>
+            <a:ext cx="11430000" cy="457200"/>
+          </a:xfrm>
+          <a:prstGeom prst="rect">
+            <a:avLst/>
+          </a:prstGeom>
+          <a:noFill/>
+        </p:spPr>
+        <p:txBody>
+          <a:bodyPr wrap="square">
+            <a:spAutoFit/>
+          </a:bodyPr>
+          <a:lstStyle/>
+          <a:p>
+            <a:pPr algn="l"/>
+            <a:r>
+              <a:rPr sz="1400" b="0" dirty="0">
+                <a:solidFill>
+                  <a:srgbClr val="CCDDF5"/>
+                </a:solidFill>
+              </a:rPr>
+              <a:t>Applying the Prompting Framework inside your IDE</a:t>
+            </a:r>
+          </a:p>
+        </p:txBody>
+      </p:sp>
+      <p:sp>
+        <p:nvSpPr>
+          <p:cNvPr id="5" name="Rectangle 4"/>
+          <p:cNvSpPr/>
+          <p:nvPr/>
+        </p:nvSpPr>
+        <p:spPr>
+          <a:xfrm>
+            <a:off x="381000" y="1426878"/>
+            <a:ext cx="11430000" cy="502920"/>
+          </a:xfrm>
+          <a:prstGeom prst="rect">
+            <a:avLst/>
+          </a:prstGeom>
+          <a:solidFill>
+            <a:srgbClr val="F2F2F2"/>
+          </a:solidFill>
+          <a:ln>
+            <a:noFill/>
+          </a:ln>
+        </p:spPr>
+        <p:style>
+          <a:lnRef idx="1">
+            <a:schemeClr val="accent1"/>
+          </a:lnRef>
+          <a:fillRef idx="3">
+            <a:schemeClr val="accent1"/>
+          </a:fillRef>
+          <a:effectRef idx="2">
+            <a:schemeClr val="accent1"/>
+          </a:effectRef>
+          <a:fontRef idx="minor">
+            <a:schemeClr val="lt1"/>
+          </a:fontRef>
+        </p:style>
+        <p:txBody>
+          <a:bodyPr rtlCol="0" anchor="ctr"/>
+          <a:lstStyle/>
+          <a:p>
+            <a:pPr algn="ctr"/>
+            <a:endParaRPr/>
+          </a:p>
+        </p:txBody>
+      </p:sp>
+      <p:sp>
+        <p:nvSpPr>
+          <p:cNvPr id="6" name="TextBox 5"/>
+          <p:cNvSpPr txBox="1"/>
+          <p:nvPr/>
+        </p:nvSpPr>
+        <p:spPr>
+          <a:xfrm>
+            <a:off x="608076" y="1516563"/>
+            <a:ext cx="10972800" cy="369332"/>
+          </a:xfrm>
+          <a:prstGeom prst="rect">
+            <a:avLst/>
+          </a:prstGeom>
+          <a:noFill/>
+        </p:spPr>
+        <p:txBody>
+          <a:bodyPr wrap="square">
+            <a:spAutoFit/>
+          </a:bodyPr>
+          <a:lstStyle/>
+          <a:p>
+            <a:pPr algn="ctr"/>
+            <a:r>
+              <a:rPr b="1" dirty="0">
+                <a:solidFill>
+                  <a:srgbClr val="00356B"/>
+                </a:solidFill>
+              </a:rPr>
+              <a:t>Framework for Success:  Role  →  Task  →  Context  →  Constraints  →  Output</a:t>
+            </a:r>
+          </a:p>
+        </p:txBody>
+      </p:sp>
+      <p:sp>
+        <p:nvSpPr>
+          <p:cNvPr id="7" name="Rectangle 6"/>
+          <p:cNvSpPr/>
+          <p:nvPr/>
+        </p:nvSpPr>
+        <p:spPr>
+          <a:xfrm>
+            <a:off x="365760" y="2377440"/>
+            <a:ext cx="2734792" cy="3200400"/>
+          </a:xfrm>
+          <a:prstGeom prst="rect">
+            <a:avLst/>
+          </a:prstGeom>
+          <a:solidFill>
+            <a:srgbClr val="E8F0FA"/>
+          </a:solidFill>
+          <a:ln>
+            <a:solidFill>
+              <a:srgbClr val="00356B"/>
+            </a:solidFill>
+          </a:ln>
+        </p:spPr>
+        <p:style>
+          <a:lnRef idx="1">
+            <a:schemeClr val="accent1"/>
+          </a:lnRef>
+          <a:fillRef idx="3">
+            <a:schemeClr val="accent1"/>
+          </a:fillRef>
+          <a:effectRef idx="2">
+            <a:schemeClr val="accent1"/>
+          </a:effectRef>
+          <a:fontRef idx="minor">
+            <a:schemeClr val="lt1"/>
+          </a:fontRef>
+        </p:style>
+        <p:txBody>
+          <a:bodyPr rtlCol="0" anchor="ctr"/>
+          <a:lstStyle/>
+          <a:p>
+            <a:pPr algn="ctr"/>
+            <a:endParaRPr/>
+          </a:p>
+        </p:txBody>
+      </p:sp>
+      <p:sp>
+        <p:nvSpPr>
+          <p:cNvPr id="8" name="TextBox 7"/>
+          <p:cNvSpPr txBox="1"/>
+          <p:nvPr/>
+        </p:nvSpPr>
+        <p:spPr>
+          <a:xfrm>
+            <a:off x="502920" y="2468880"/>
+            <a:ext cx="2529683" cy="338554"/>
+          </a:xfrm>
+          <a:prstGeom prst="rect">
+            <a:avLst/>
+          </a:prstGeom>
+          <a:noFill/>
+        </p:spPr>
+        <p:txBody>
+          <a:bodyPr wrap="square">
+            <a:spAutoFit/>
+          </a:bodyPr>
+          <a:lstStyle/>
+          <a:p>
+            <a:pPr algn="l"/>
+            <a:r>
+              <a:rPr sz="1600" b="1" dirty="0">
+                <a:solidFill>
+                  <a:srgbClr val="00356B"/>
+                </a:solidFill>
+              </a:rPr>
+              <a:t>Deterministic Intent</a:t>
+            </a:r>
+          </a:p>
+        </p:txBody>
+      </p:sp>
+      <p:sp>
+        <p:nvSpPr>
+          <p:cNvPr id="9" name="TextBox 8"/>
+          <p:cNvSpPr txBox="1"/>
+          <p:nvPr/>
+        </p:nvSpPr>
+        <p:spPr>
+          <a:xfrm>
+            <a:off x="502920" y="3017520"/>
+            <a:ext cx="2529683" cy="1477328"/>
+          </a:xfrm>
+          <a:prstGeom prst="rect">
+            <a:avLst/>
+          </a:prstGeom>
+          <a:noFill/>
+        </p:spPr>
+        <p:txBody>
+          <a:bodyPr wrap="square">
+            <a:spAutoFit/>
+          </a:bodyPr>
+          <a:lstStyle/>
+          <a:p>
+            <a:pPr algn="l"/>
+            <a:r>
+              <a:rPr b="0" dirty="0">
+                <a:solidFill>
+                  <a:srgbClr val="333333"/>
+                </a:solidFill>
+              </a:rPr>
+              <a:t>Dictate exact methods, transformations, and packages. Never leave statistical decisions to the model's defaults.</a:t>
+            </a:r>
+          </a:p>
+        </p:txBody>
+      </p:sp>
+      <p:sp>
+        <p:nvSpPr>
+          <p:cNvPr id="10" name="Rectangle 9"/>
+          <p:cNvSpPr/>
+          <p:nvPr/>
+        </p:nvSpPr>
+        <p:spPr>
+          <a:xfrm>
+            <a:off x="3265038" y="2372710"/>
+            <a:ext cx="2734792" cy="3200400"/>
+          </a:xfrm>
+          <a:prstGeom prst="rect">
+            <a:avLst/>
+          </a:prstGeom>
+          <a:solidFill>
+            <a:srgbClr val="E8F0FA"/>
+          </a:solidFill>
+          <a:ln>
+            <a:solidFill>
+              <a:srgbClr val="00356B"/>
+            </a:solidFill>
+          </a:ln>
+        </p:spPr>
+        <p:style>
+          <a:lnRef idx="1">
+            <a:schemeClr val="accent1"/>
+          </a:lnRef>
+          <a:fillRef idx="3">
+            <a:schemeClr val="accent1"/>
+          </a:fillRef>
+          <a:effectRef idx="2">
+            <a:schemeClr val="accent1"/>
+          </a:effectRef>
+          <a:fontRef idx="minor">
+            <a:schemeClr val="lt1"/>
+          </a:fontRef>
+        </p:style>
+        <p:txBody>
+          <a:bodyPr rtlCol="0" anchor="ctr"/>
+          <a:lstStyle/>
+          <a:p>
+            <a:pPr algn="ctr"/>
+            <a:endParaRPr/>
+          </a:p>
+        </p:txBody>
+      </p:sp>
+      <p:sp>
+        <p:nvSpPr>
+          <p:cNvPr id="11" name="TextBox 10"/>
+          <p:cNvSpPr txBox="1"/>
+          <p:nvPr/>
+        </p:nvSpPr>
+        <p:spPr>
+          <a:xfrm>
+            <a:off x="3402198" y="2464150"/>
+            <a:ext cx="2529683" cy="338554"/>
+          </a:xfrm>
+          <a:prstGeom prst="rect">
+            <a:avLst/>
+          </a:prstGeom>
+          <a:noFill/>
+        </p:spPr>
+        <p:txBody>
+          <a:bodyPr wrap="square">
+            <a:spAutoFit/>
+          </a:bodyPr>
+          <a:lstStyle/>
+          <a:p>
+            <a:pPr algn="l"/>
+            <a:r>
+              <a:rPr sz="1600" b="1" dirty="0">
+                <a:solidFill>
+                  <a:srgbClr val="00356B"/>
+                </a:solidFill>
+              </a:rPr>
+              <a:t>Continuous Auditability</a:t>
+            </a:r>
+          </a:p>
+        </p:txBody>
+      </p:sp>
+      <p:sp>
+        <p:nvSpPr>
+          <p:cNvPr id="12" name="TextBox 11"/>
+          <p:cNvSpPr txBox="1"/>
+          <p:nvPr/>
+        </p:nvSpPr>
+        <p:spPr>
+          <a:xfrm>
+            <a:off x="3402198" y="3012790"/>
+            <a:ext cx="2529683" cy="1754326"/>
+          </a:xfrm>
+          <a:prstGeom prst="rect">
+            <a:avLst/>
+          </a:prstGeom>
+          <a:noFill/>
+        </p:spPr>
+        <p:txBody>
+          <a:bodyPr wrap="square">
+            <a:spAutoFit/>
+          </a:bodyPr>
+          <a:lstStyle/>
+          <a:p>
+            <a:pPr algn="l"/>
+            <a:r>
+              <a:rPr b="0" dirty="0">
+                <a:solidFill>
+                  <a:srgbClr val="333333"/>
+                </a:solidFill>
+              </a:rPr>
+              <a:t>Force the AI to comment every line. You must be able to explain and defend every transformation it produces.</a:t>
+            </a:r>
+          </a:p>
+        </p:txBody>
+      </p:sp>
+      <p:sp>
+        <p:nvSpPr>
+          <p:cNvPr id="13" name="Rectangle 12"/>
+          <p:cNvSpPr/>
+          <p:nvPr/>
+        </p:nvSpPr>
+        <p:spPr>
+          <a:xfrm>
+            <a:off x="6192170" y="2377440"/>
+            <a:ext cx="2734792" cy="3200400"/>
+          </a:xfrm>
+          <a:prstGeom prst="rect">
+            <a:avLst/>
+          </a:prstGeom>
+          <a:solidFill>
+            <a:srgbClr val="E8F0FA"/>
+          </a:solidFill>
+          <a:ln>
+            <a:solidFill>
+              <a:srgbClr val="00356B"/>
+            </a:solidFill>
+          </a:ln>
+        </p:spPr>
+        <p:style>
+          <a:lnRef idx="1">
+            <a:schemeClr val="accent1"/>
+          </a:lnRef>
+          <a:fillRef idx="3">
+            <a:schemeClr val="accent1"/>
+          </a:fillRef>
+          <a:effectRef idx="2">
+            <a:schemeClr val="accent1"/>
+          </a:effectRef>
+          <a:fontRef idx="minor">
+            <a:schemeClr val="lt1"/>
+          </a:fontRef>
+        </p:style>
+        <p:txBody>
+          <a:bodyPr rtlCol="0" anchor="ctr"/>
+          <a:lstStyle/>
+          <a:p>
+            <a:pPr algn="ctr"/>
+            <a:endParaRPr dirty="0"/>
+          </a:p>
+        </p:txBody>
+      </p:sp>
+      <p:sp>
+        <p:nvSpPr>
+          <p:cNvPr id="14" name="TextBox 13"/>
+          <p:cNvSpPr txBox="1"/>
+          <p:nvPr/>
+        </p:nvSpPr>
+        <p:spPr>
+          <a:xfrm>
+            <a:off x="6329330" y="2468880"/>
+            <a:ext cx="2529683" cy="338554"/>
+          </a:xfrm>
+          <a:prstGeom prst="rect">
+            <a:avLst/>
+          </a:prstGeom>
+          <a:noFill/>
+        </p:spPr>
+        <p:txBody>
+          <a:bodyPr wrap="square">
+            <a:spAutoFit/>
+          </a:bodyPr>
+          <a:lstStyle/>
+          <a:p>
+            <a:pPr algn="l"/>
+            <a:r>
+              <a:rPr sz="1600" b="1">
+                <a:solidFill>
+                  <a:srgbClr val="00356B"/>
+                </a:solidFill>
+              </a:rPr>
+              <a:t>Reproducibility</a:t>
+            </a:r>
+          </a:p>
+        </p:txBody>
+      </p:sp>
+      <p:sp>
+        <p:nvSpPr>
+          <p:cNvPr id="15" name="TextBox 14"/>
+          <p:cNvSpPr txBox="1"/>
+          <p:nvPr/>
+        </p:nvSpPr>
+        <p:spPr>
+          <a:xfrm>
+            <a:off x="6329330" y="3017520"/>
+            <a:ext cx="2529683" cy="1754326"/>
+          </a:xfrm>
+          <a:prstGeom prst="rect">
+            <a:avLst/>
+          </a:prstGeom>
+          <a:noFill/>
+        </p:spPr>
+        <p:txBody>
+          <a:bodyPr wrap="square">
+            <a:spAutoFit/>
+          </a:bodyPr>
+          <a:lstStyle/>
+          <a:p>
+            <a:pPr algn="l"/>
+            <a:r>
+              <a:rPr b="0" dirty="0">
+                <a:solidFill>
+                  <a:srgbClr val="333333"/>
+                </a:solidFill>
+              </a:rPr>
+              <a:t>Build scripts that are mathematically sound and publication-ready. Structured prompts → structured, auditable outputs.</a:t>
+            </a:r>
+          </a:p>
+        </p:txBody>
+      </p:sp>
+      <p:sp>
+        <p:nvSpPr>
+          <p:cNvPr id="16" name="Rectangle 15"/>
+          <p:cNvSpPr/>
+          <p:nvPr/>
+        </p:nvSpPr>
+        <p:spPr>
+          <a:xfrm>
+            <a:off x="365760" y="5760720"/>
+            <a:ext cx="11430000" cy="594360"/>
+          </a:xfrm>
+          <a:prstGeom prst="rect">
+            <a:avLst/>
+          </a:prstGeom>
+          <a:solidFill>
+            <a:srgbClr val="FFF3CD"/>
+          </a:solidFill>
+          <a:ln>
+            <a:solidFill>
+              <a:srgbClr val="F0AD4E"/>
+            </a:solidFill>
+          </a:ln>
+        </p:spPr>
+        <p:style>
+          <a:lnRef idx="1">
+            <a:schemeClr val="accent1"/>
+          </a:lnRef>
+          <a:fillRef idx="3">
+            <a:schemeClr val="accent1"/>
+          </a:fillRef>
+          <a:effectRef idx="2">
+            <a:schemeClr val="accent1"/>
+          </a:effectRef>
+          <a:fontRef idx="minor">
+            <a:schemeClr val="lt1"/>
+          </a:fontRef>
+        </p:style>
+        <p:txBody>
+          <a:bodyPr rtlCol="0" anchor="ctr"/>
+          <a:lstStyle/>
+          <a:p>
+            <a:pPr algn="ctr"/>
+            <a:endParaRPr/>
+          </a:p>
+        </p:txBody>
+      </p:sp>
+      <p:sp>
+        <p:nvSpPr>
+          <p:cNvPr id="17" name="TextBox 16"/>
+          <p:cNvSpPr txBox="1"/>
+          <p:nvPr/>
+        </p:nvSpPr>
+        <p:spPr>
+          <a:xfrm>
+            <a:off x="409956" y="5904011"/>
+            <a:ext cx="11369040" cy="307777"/>
+          </a:xfrm>
+          <a:prstGeom prst="rect">
+            <a:avLst/>
+          </a:prstGeom>
+          <a:noFill/>
+        </p:spPr>
+        <p:txBody>
+          <a:bodyPr wrap="square">
+            <a:spAutoFit/>
+          </a:bodyPr>
+          <a:lstStyle/>
+          <a:p>
+            <a:pPr algn="l"/>
+            <a:r>
+              <a:rPr sz="1400" b="0" dirty="0">
+                <a:solidFill>
+                  <a:srgbClr val="855300"/>
+                </a:solidFill>
+              </a:rPr>
+              <a:t>⚠   We cannot rely on 'vibe coding' — a vague instruction does not guarantee correct statistics. Strict prompting is more critical in the IDE, not less.</a:t>
+            </a:r>
+          </a:p>
+        </p:txBody>
+      </p:sp>
+      <p:sp>
+        <p:nvSpPr>
+          <p:cNvPr id="18" name="Rectangle 17">
+            <a:extLst>
+              <a:ext uri="{FF2B5EF4-FFF2-40B4-BE49-F238E27FC236}">
+                <a16:creationId xmlns:a16="http://schemas.microsoft.com/office/drawing/2014/main" id="{DE14D25F-912B-3C83-2A8F-789A598A86FE}"/>
+              </a:ext>
+            </a:extLst>
+          </p:cNvPr>
+          <p:cNvSpPr/>
+          <p:nvPr/>
+        </p:nvSpPr>
+        <p:spPr>
+          <a:xfrm>
+            <a:off x="9091448" y="2372710"/>
+            <a:ext cx="2734792" cy="3200400"/>
+          </a:xfrm>
+          <a:prstGeom prst="rect">
+            <a:avLst/>
+          </a:prstGeom>
+          <a:solidFill>
+            <a:srgbClr val="E8F0FA"/>
+          </a:solidFill>
+          <a:ln>
+            <a:solidFill>
+              <a:srgbClr val="00356B"/>
+            </a:solidFill>
+          </a:ln>
+        </p:spPr>
+        <p:style>
+          <a:lnRef idx="1">
+            <a:schemeClr val="accent1"/>
+          </a:lnRef>
+          <a:fillRef idx="3">
+            <a:schemeClr val="accent1"/>
+          </a:fillRef>
+          <a:effectRef idx="2">
+            <a:schemeClr val="accent1"/>
+          </a:effectRef>
+          <a:fontRef idx="minor">
+            <a:schemeClr val="lt1"/>
+          </a:fontRef>
+        </p:style>
+        <p:txBody>
+          <a:bodyPr rtlCol="0" anchor="ctr"/>
+          <a:lstStyle/>
+          <a:p>
+            <a:pPr algn="ctr"/>
+            <a:endParaRPr/>
+          </a:p>
+        </p:txBody>
+      </p:sp>
+      <p:sp>
+        <p:nvSpPr>
+          <p:cNvPr id="19" name="TextBox 18">
+            <a:extLst>
+              <a:ext uri="{FF2B5EF4-FFF2-40B4-BE49-F238E27FC236}">
+                <a16:creationId xmlns:a16="http://schemas.microsoft.com/office/drawing/2014/main" id="{85F75BCE-95B8-9093-86A5-962E1734C239}"/>
+              </a:ext>
+            </a:extLst>
+          </p:cNvPr>
+          <p:cNvSpPr txBox="1"/>
+          <p:nvPr/>
+        </p:nvSpPr>
+        <p:spPr>
+          <a:xfrm>
+            <a:off x="9228608" y="2464150"/>
+            <a:ext cx="2529683" cy="338554"/>
+          </a:xfrm>
+          <a:prstGeom prst="rect">
+            <a:avLst/>
+          </a:prstGeom>
+          <a:noFill/>
+        </p:spPr>
+        <p:txBody>
+          <a:bodyPr wrap="square">
+            <a:spAutoFit/>
+          </a:bodyPr>
+          <a:lstStyle/>
+          <a:p>
+            <a:pPr algn="l"/>
+            <a:r>
+              <a:rPr lang="en-US" sz="1600" b="1" dirty="0">
+                <a:solidFill>
+                  <a:srgbClr val="00356B"/>
+                </a:solidFill>
+              </a:rPr>
+              <a:t>Human-in-the-loop</a:t>
+            </a:r>
+            <a:endParaRPr sz="1600" b="1" dirty="0">
+              <a:solidFill>
+                <a:srgbClr val="00356B"/>
+              </a:solidFill>
+            </a:endParaRPr>
+          </a:p>
+        </p:txBody>
+      </p:sp>
+      <p:sp>
+        <p:nvSpPr>
+          <p:cNvPr id="20" name="TextBox 19">
+            <a:extLst>
+              <a:ext uri="{FF2B5EF4-FFF2-40B4-BE49-F238E27FC236}">
+                <a16:creationId xmlns:a16="http://schemas.microsoft.com/office/drawing/2014/main" id="{A3F738C4-3FBF-9DCB-6481-CA4901E466C9}"/>
+              </a:ext>
+            </a:extLst>
+          </p:cNvPr>
+          <p:cNvSpPr txBox="1"/>
+          <p:nvPr/>
+        </p:nvSpPr>
+        <p:spPr>
+          <a:xfrm>
+            <a:off x="9228608" y="3012790"/>
+            <a:ext cx="2529683" cy="2308324"/>
+          </a:xfrm>
+          <a:prstGeom prst="rect">
+            <a:avLst/>
+          </a:prstGeom>
+          <a:noFill/>
+        </p:spPr>
+        <p:txBody>
+          <a:bodyPr wrap="square">
+            <a:spAutoFit/>
+          </a:bodyPr>
+          <a:lstStyle/>
+          <a:p>
+            <a:pPr algn="l"/>
+            <a:r>
+              <a:rPr lang="en-US" b="0" dirty="0">
+                <a:solidFill>
+                  <a:srgbClr val="333333"/>
+                </a:solidFill>
+              </a:rPr>
+              <a:t>Every AI output must pass through domain expert review before it informs any decision. Prompting discipline reduces errors — it does not eliminate them. </a:t>
+            </a:r>
+            <a:endParaRPr b="0" dirty="0">
+              <a:solidFill>
+                <a:srgbClr val="333333"/>
+              </a:solidFill>
+            </a:endParaRPr>
+          </a:p>
+        </p:txBody>
+      </p:sp>
+    </p:spTree>
+  </p:cSld>
+  <p:clrMapOvr>
+    <a:masterClrMapping/>
+  </p:clrMapOvr>
+</p:sld>
+</file>
+
+<file path=ppt/slides/slide24.xml><?xml version="1.0" encoding="utf-8"?>
+<p:sld xmlns:a="http://schemas.openxmlformats.org/drawingml/2006/main" xmlns:r="http://schemas.openxmlformats.org/officeDocument/2006/relationships" xmlns:p="http://schemas.openxmlformats.org/presentationml/2006/main">
+  <p:cSld>
+    <p:spTree>
+      <p:nvGrpSpPr>
+        <p:cNvPr id="1" name=""/>
+        <p:cNvGrpSpPr/>
+        <p:nvPr/>
+      </p:nvGrpSpPr>
+      <p:grpSpPr>
+        <a:xfrm>
+          <a:off x="0" y="0"/>
+          <a:ext cx="0" cy="0"/>
+          <a:chOff x="0" y="0"/>
+          <a:chExt cx="0" cy="0"/>
+        </a:xfrm>
+      </p:grpSpPr>
+      <p:sp>
+        <p:nvSpPr>
+          <p:cNvPr id="2" name="Rectangle 1"/>
+          <p:cNvSpPr/>
+          <p:nvPr/>
+        </p:nvSpPr>
+        <p:spPr>
+          <a:xfrm>
+            <a:off x="0" y="0"/>
+            <a:ext cx="12188952" cy="1280160"/>
+          </a:xfrm>
+          <a:prstGeom prst="rect">
+            <a:avLst/>
+          </a:prstGeom>
+          <a:solidFill>
+            <a:srgbClr val="00356B"/>
+          </a:solidFill>
+          <a:ln>
+            <a:noFill/>
+          </a:ln>
+        </p:spPr>
+        <p:txBody>
+          <a:bodyPr rtlCol="0" anchor="ctr"/>
+          <a:lstStyle/>
+          <a:p>
+            <a:pPr algn="ctr"/>
+            <a:endParaRPr/>
+          </a:p>
+        </p:txBody>
+      </p:sp>
+      <p:sp>
+        <p:nvSpPr>
+          <p:cNvPr id="3" name="TextBox 2"/>
+          <p:cNvSpPr txBox="1"/>
+          <p:nvPr/>
+        </p:nvSpPr>
+        <p:spPr>
+          <a:xfrm>
+            <a:off x="274320" y="137160"/>
+            <a:ext cx="11430000" cy="523220"/>
+          </a:xfrm>
+          <a:prstGeom prst="rect">
+            <a:avLst/>
+          </a:prstGeom>
+          <a:noFill/>
+        </p:spPr>
+        <p:txBody>
+          <a:bodyPr wrap="square">
+            <a:spAutoFit/>
+          </a:bodyPr>
+          <a:lstStyle/>
+          <a:p>
+            <a:pPr algn="l"/>
+            <a:r>
+              <a:rPr sz="2800" b="1">
+                <a:solidFill>
+                  <a:srgbClr val="FFFFFF"/>
+                </a:solidFill>
+                <a:latin typeface="YaleNew" panose="02000602050000020003" pitchFamily="2" charset="77"/>
+              </a:rPr>
+              <a:t>AI Coding Agents vs. Pair Programmer IDEs</a:t>
+            </a:r>
+          </a:p>
+        </p:txBody>
+      </p:sp>
+      <p:sp>
+        <p:nvSpPr>
+          <p:cNvPr id="4" name="TextBox 3"/>
+          <p:cNvSpPr txBox="1"/>
+          <p:nvPr/>
+        </p:nvSpPr>
+        <p:spPr>
+          <a:xfrm>
+            <a:off x="274320" y="731520"/>
+            <a:ext cx="11430000" cy="457200"/>
+          </a:xfrm>
+          <a:prstGeom prst="rect">
+            <a:avLst/>
+          </a:prstGeom>
+          <a:noFill/>
+        </p:spPr>
+        <p:txBody>
+          <a:bodyPr wrap="square">
+            <a:spAutoFit/>
+          </a:bodyPr>
+          <a:lstStyle/>
+          <a:p>
+            <a:pPr algn="l"/>
+            <a:r>
+              <a:rPr sz="1400" b="0">
+                <a:solidFill>
+                  <a:srgbClr val="CCDDF5"/>
+                </a:solidFill>
+              </a:rPr>
+              <a:t>Two approaches to AI-assisted development — different workflows, different strengths</a:t>
+            </a:r>
+          </a:p>
+        </p:txBody>
+      </p:sp>
+      <p:sp>
+        <p:nvSpPr>
+          <p:cNvPr id="7" name="Rectangle 6"/>
+          <p:cNvSpPr/>
+          <p:nvPr/>
+        </p:nvSpPr>
+        <p:spPr>
+          <a:xfrm>
+            <a:off x="365760" y="1508760"/>
+            <a:ext cx="5577840" cy="4937760"/>
+          </a:xfrm>
+          <a:prstGeom prst="rect">
+            <a:avLst/>
+          </a:prstGeom>
+          <a:solidFill>
+            <a:srgbClr val="E8F0FA"/>
+          </a:solidFill>
+          <a:ln>
+            <a:solidFill>
+              <a:srgbClr val="00356B"/>
+            </a:solidFill>
+          </a:ln>
+        </p:spPr>
+        <p:txBody>
+          <a:bodyPr rtlCol="0" anchor="ctr"/>
+          <a:lstStyle/>
+          <a:p>
+            <a:pPr algn="ctr"/>
+            <a:endParaRPr/>
+          </a:p>
+        </p:txBody>
+      </p:sp>
+      <p:sp>
+        <p:nvSpPr>
+          <p:cNvPr id="8" name="TextBox 7"/>
+          <p:cNvSpPr txBox="1"/>
+          <p:nvPr/>
+        </p:nvSpPr>
+        <p:spPr>
+          <a:xfrm>
+            <a:off x="502920" y="1600200"/>
+            <a:ext cx="5303520" cy="502920"/>
+          </a:xfrm>
+          <a:prstGeom prst="rect">
+            <a:avLst/>
+          </a:prstGeom>
+          <a:noFill/>
+        </p:spPr>
+        <p:txBody>
+          <a:bodyPr wrap="square">
+            <a:spAutoFit/>
+          </a:bodyPr>
+          <a:lstStyle/>
+          <a:p>
+            <a:pPr algn="l"/>
+            <a:r>
+              <a:rPr sz="1800" b="1">
+                <a:solidFill>
+                  <a:srgbClr val="00356B"/>
+                </a:solidFill>
+              </a:rPr>
+              <a:t>Pair Programmer IDEs</a:t>
+            </a:r>
+          </a:p>
+        </p:txBody>
+      </p:sp>
+      <p:sp>
+        <p:nvSpPr>
+          <p:cNvPr id="9" name="TextBox 8"/>
+          <p:cNvSpPr txBox="1"/>
+          <p:nvPr/>
+        </p:nvSpPr>
+        <p:spPr>
+          <a:xfrm>
+            <a:off x="502920" y="2103120"/>
+            <a:ext cx="5303520" cy="4114800"/>
+          </a:xfrm>
+          <a:prstGeom prst="rect">
+            <a:avLst/>
+          </a:prstGeom>
+          <a:noFill/>
+        </p:spPr>
+        <p:txBody>
+          <a:bodyPr wrap="square">
+            <a:noAutofit/>
+          </a:bodyPr>
+          <a:lstStyle/>
+          <a:p>
+            <a:pPr algn="l">
+              <a:spcBef>
+                <a:spcPts val="200"/>
+              </a:spcBef>
+            </a:pPr>
+            <a:r>
+              <a:rPr b="1">
+                <a:solidFill>
+                  <a:srgbClr val="00356B"/>
+                </a:solidFill>
+              </a:rPr>
+              <a:t>How they work:</a:t>
+            </a:r>
+            <a:r>
+              <a:rPr b="0">
+                <a:solidFill>
+                  <a:srgbClr val="333333"/>
+                </a:solidFill>
+              </a:rPr>
+              <a:t>  Embedded inside a graphical code editor (VS Code, Cursor, Positron). AI assists as you type.</a:t>
+            </a:r>
+          </a:p>
+          <a:p>
+            <a:pPr algn="l">
+              <a:spcBef>
+                <a:spcPts val="600"/>
+              </a:spcBef>
+            </a:pPr>
+            <a:r>
+              <a:rPr b="1">
+                <a:solidFill>
+                  <a:srgbClr val="00356B"/>
+                </a:solidFill>
+              </a:rPr>
+              <a:t>Best for:</a:t>
+            </a:r>
+            <a:r>
+              <a:rPr b="0">
+                <a:solidFill>
+                  <a:srgbClr val="333333"/>
+                </a:solidFill>
+              </a:rPr>
+              <a:t>  Real-time autocomplete, inline chat, iterative editing within a single file or small project.</a:t>
+            </a:r>
+          </a:p>
+          <a:p>
+            <a:pPr algn="l">
+              <a:spcBef>
+                <a:spcPts val="600"/>
+              </a:spcBef>
+            </a:pPr>
+            <a:r>
+              <a:rPr b="1">
+                <a:solidFill>
+                  <a:srgbClr val="00356B"/>
+                </a:solidFill>
+              </a:rPr>
+              <a:t>Interaction style:</a:t>
+            </a:r>
+            <a:r>
+              <a:rPr b="0">
+                <a:solidFill>
+                  <a:srgbClr val="333333"/>
+                </a:solidFill>
+              </a:rPr>
+              <a:t>  You drive; AI suggests. Tab-complete, inline diffs, chat sidebar.</a:t>
+            </a:r>
+          </a:p>
+          <a:p>
+            <a:pPr algn="l">
+              <a:spcBef>
+                <a:spcPts val="600"/>
+              </a:spcBef>
+            </a:pPr>
+            <a:r>
+              <a:rPr sz="1600" b="1">
+                <a:solidFill>
+                  <a:srgbClr val="00356B"/>
+                </a:solidFill>
+              </a:rPr>
+              <a:t>Examples:</a:t>
+            </a:r>
+          </a:p>
+          <a:p>
+            <a:pPr algn="l">
+              <a:spcBef>
+                <a:spcPts val="200"/>
+              </a:spcBef>
+            </a:pPr>
+            <a:r>
+              <a:rPr sz="1600" b="0">
+                <a:solidFill>
+                  <a:srgbClr val="333333"/>
+                </a:solidFill>
+              </a:rPr>
+              <a:t>  ▸  </a:t>
+            </a:r>
+            <a:r>
+              <a:rPr lang="en-US" b="0">
+                <a:solidFill>
+                  <a:srgbClr val="333333"/>
+                </a:solidFill>
+              </a:rPr>
+              <a:t>VS Code w/ Copilot</a:t>
+            </a:r>
+            <a:r>
+              <a:rPr b="0">
+                <a:solidFill>
+                  <a:srgbClr val="333333"/>
+                </a:solidFill>
+              </a:rPr>
+              <a:t> </a:t>
+            </a:r>
+            <a:r>
+              <a:rPr lang="en-US" b="0">
+                <a:solidFill>
+                  <a:srgbClr val="333333"/>
+                </a:solidFill>
+              </a:rPr>
+              <a:t>- </a:t>
+            </a:r>
+            <a:r>
+              <a:rPr b="0">
+                <a:solidFill>
+                  <a:srgbClr val="333333"/>
+                </a:solidFill>
+              </a:rPr>
+              <a:t>2K completions/mo free</a:t>
+            </a:r>
+          </a:p>
+          <a:p>
+            <a:pPr algn="l">
+              <a:spcBef>
+                <a:spcPts val="200"/>
+              </a:spcBef>
+            </a:pPr>
+            <a:r>
+              <a:rPr b="0">
+                <a:solidFill>
+                  <a:srgbClr val="333333"/>
+                </a:solidFill>
+              </a:rPr>
+              <a:t>  ▸  Cursor IDE — 2K completions + 50 </a:t>
+            </a:r>
+            <a:r>
+              <a:rPr lang="en-US">
+                <a:solidFill>
+                  <a:srgbClr val="333333"/>
+                </a:solidFill>
+              </a:rPr>
+              <a:t>chat</a:t>
+            </a:r>
+            <a:r>
+              <a:rPr b="0">
+                <a:solidFill>
+                  <a:srgbClr val="333333"/>
+                </a:solidFill>
+              </a:rPr>
+              <a:t>/mo free</a:t>
+            </a:r>
+          </a:p>
+          <a:p>
+            <a:pPr algn="l">
+              <a:spcBef>
+                <a:spcPts val="200"/>
+              </a:spcBef>
+            </a:pPr>
+            <a:r>
+              <a:rPr b="0">
+                <a:solidFill>
+                  <a:srgbClr val="333333"/>
+                </a:solidFill>
+              </a:rPr>
+              <a:t>  ▸  Google Antigravity — Free during preview</a:t>
+            </a:r>
+          </a:p>
+          <a:p>
+            <a:pPr algn="l">
+              <a:spcBef>
+                <a:spcPts val="200"/>
+              </a:spcBef>
+            </a:pPr>
+            <a:r>
+              <a:rPr b="0">
+                <a:solidFill>
+                  <a:srgbClr val="333333"/>
+                </a:solidFill>
+              </a:rPr>
+              <a:t>  ▸  Positron + Assistant — Trial, then $20/mo</a:t>
+            </a:r>
+          </a:p>
+        </p:txBody>
+      </p:sp>
+      <p:sp>
+        <p:nvSpPr>
+          <p:cNvPr id="10" name="Rectangle 9"/>
+          <p:cNvSpPr/>
+          <p:nvPr/>
+        </p:nvSpPr>
+        <p:spPr>
+          <a:xfrm>
+            <a:off x="6217920" y="1508760"/>
+            <a:ext cx="5577840" cy="4937760"/>
+          </a:xfrm>
+          <a:prstGeom prst="rect">
+            <a:avLst/>
+          </a:prstGeom>
+          <a:solidFill>
+            <a:srgbClr val="F2F2F2"/>
+          </a:solidFill>
+          <a:ln>
+            <a:solidFill>
+              <a:srgbClr val="00356B"/>
+            </a:solidFill>
+          </a:ln>
+        </p:spPr>
+        <p:txBody>
+          <a:bodyPr rtlCol="0" anchor="ctr"/>
+          <a:lstStyle/>
+          <a:p>
+            <a:pPr algn="ctr"/>
+            <a:endParaRPr/>
+          </a:p>
+        </p:txBody>
+      </p:sp>
+      <p:sp>
+        <p:nvSpPr>
+          <p:cNvPr id="11" name="TextBox 10"/>
+          <p:cNvSpPr txBox="1"/>
+          <p:nvPr/>
+        </p:nvSpPr>
+        <p:spPr>
+          <a:xfrm>
+            <a:off x="6355080" y="1600200"/>
+            <a:ext cx="5303520" cy="502920"/>
+          </a:xfrm>
+          <a:prstGeom prst="rect">
+            <a:avLst/>
+          </a:prstGeom>
+          <a:noFill/>
+        </p:spPr>
+        <p:txBody>
+          <a:bodyPr wrap="square">
+            <a:spAutoFit/>
+          </a:bodyPr>
+          <a:lstStyle/>
+          <a:p>
+            <a:pPr algn="l"/>
+            <a:r>
+              <a:rPr sz="1800" b="1">
+                <a:solidFill>
+                  <a:srgbClr val="00356B"/>
+                </a:solidFill>
+              </a:rPr>
+              <a:t>CLI Coding Agents</a:t>
+            </a:r>
+          </a:p>
+        </p:txBody>
+      </p:sp>
+      <p:sp>
+        <p:nvSpPr>
+          <p:cNvPr id="12" name="TextBox 11"/>
+          <p:cNvSpPr txBox="1"/>
+          <p:nvPr/>
+        </p:nvSpPr>
+        <p:spPr>
+          <a:xfrm>
+            <a:off x="6355080" y="2103120"/>
+            <a:ext cx="5303520" cy="4114800"/>
+          </a:xfrm>
+          <a:prstGeom prst="rect">
+            <a:avLst/>
+          </a:prstGeom>
+          <a:noFill/>
+        </p:spPr>
+        <p:txBody>
+          <a:bodyPr wrap="square">
+            <a:noAutofit/>
+          </a:bodyPr>
+          <a:lstStyle/>
+          <a:p>
+            <a:pPr algn="l">
+              <a:spcBef>
+                <a:spcPts val="200"/>
+              </a:spcBef>
+            </a:pPr>
+            <a:r>
+              <a:rPr b="1">
+                <a:solidFill>
+                  <a:srgbClr val="00356B"/>
+                </a:solidFill>
+              </a:rPr>
+              <a:t>How they work:</a:t>
+            </a:r>
+            <a:r>
+              <a:rPr b="0">
+                <a:solidFill>
+                  <a:srgbClr val="333333"/>
+                </a:solidFill>
+              </a:rPr>
+              <a:t>  Run in your terminal. Autonomous agents that read, write, and execute across your entire project.</a:t>
+            </a:r>
+          </a:p>
+          <a:p>
+            <a:pPr algn="l">
+              <a:spcBef>
+                <a:spcPts val="600"/>
+              </a:spcBef>
+            </a:pPr>
+            <a:r>
+              <a:rPr b="1">
+                <a:solidFill>
+                  <a:srgbClr val="00356B"/>
+                </a:solidFill>
+              </a:rPr>
+              <a:t>Best for:</a:t>
+            </a:r>
+            <a:r>
+              <a:rPr b="0">
+                <a:solidFill>
+                  <a:srgbClr val="333333"/>
+                </a:solidFill>
+              </a:rPr>
+              <a:t>  Multi-file refactors, scaffolding, running tests, orchestrating complex workflows end-to-end.</a:t>
+            </a:r>
+          </a:p>
+          <a:p>
+            <a:pPr algn="l">
+              <a:spcBef>
+                <a:spcPts val="600"/>
+              </a:spcBef>
+            </a:pPr>
+            <a:r>
+              <a:rPr b="1">
+                <a:solidFill>
+                  <a:srgbClr val="00356B"/>
+                </a:solidFill>
+              </a:rPr>
+              <a:t>Interaction style:</a:t>
+            </a:r>
+            <a:r>
+              <a:rPr b="0">
+                <a:solidFill>
+                  <a:srgbClr val="333333"/>
+                </a:solidFill>
+              </a:rPr>
+              <a:t>  AI drives; you review. Give a high-level prompt, agent plans and executes steps.</a:t>
+            </a:r>
+          </a:p>
+          <a:p>
+            <a:pPr algn="l">
+              <a:spcBef>
+                <a:spcPts val="600"/>
+              </a:spcBef>
+            </a:pPr>
+            <a:r>
+              <a:rPr sz="1600" b="1">
+                <a:solidFill>
+                  <a:srgbClr val="00356B"/>
+                </a:solidFill>
+              </a:rPr>
+              <a:t>Examples:</a:t>
+            </a:r>
+          </a:p>
+          <a:p>
+            <a:pPr algn="l">
+              <a:spcBef>
+                <a:spcPts val="200"/>
+              </a:spcBef>
+            </a:pPr>
+            <a:r>
+              <a:rPr sz="1600" b="0">
+                <a:solidFill>
+                  <a:srgbClr val="333333"/>
+                </a:solidFill>
+              </a:rPr>
+              <a:t>  </a:t>
+            </a:r>
+            <a:r>
+              <a:rPr b="0">
+                <a:solidFill>
+                  <a:srgbClr val="333333"/>
+                </a:solidFill>
+              </a:rPr>
+              <a:t>▸  Claude Code — Requires Pro/Max subscription</a:t>
+            </a:r>
+          </a:p>
+          <a:p>
+            <a:pPr algn="l">
+              <a:spcBef>
+                <a:spcPts val="200"/>
+              </a:spcBef>
+            </a:pPr>
+            <a:r>
+              <a:rPr b="0">
+                <a:solidFill>
+                  <a:srgbClr val="333333"/>
+                </a:solidFill>
+              </a:rPr>
+              <a:t>  ▸  Gemini CLI — 1K requests/day free</a:t>
+            </a:r>
+          </a:p>
+          <a:p>
+            <a:pPr algn="l">
+              <a:spcBef>
+                <a:spcPts val="200"/>
+              </a:spcBef>
+            </a:pPr>
+            <a:r>
+              <a:rPr b="0">
+                <a:solidFill>
+                  <a:srgbClr val="333333"/>
+                </a:solidFill>
+              </a:rPr>
+              <a:t>  ▸  OpenAI Codex — ChatGPT Plus ($20/mo)</a:t>
+            </a:r>
+          </a:p>
+          <a:p>
+            <a:pPr algn="l">
+              <a:spcBef>
+                <a:spcPts val="200"/>
+              </a:spcBef>
+            </a:pPr>
+            <a:r>
+              <a:rPr b="0">
+                <a:solidFill>
+                  <a:srgbClr val="333333"/>
+                </a:solidFill>
+              </a:rPr>
+              <a:t>  ▸  OpenCode — Free/open-source (BYOK)</a:t>
+            </a:r>
+          </a:p>
+        </p:txBody>
+      </p:sp>
+    </p:spTree>
+    <p:extLst>
+      <p:ext uri="{BB962C8B-B14F-4D97-AF65-F5344CB8AC3E}">
+        <p14:creationId xmlns:p14="http://schemas.microsoft.com/office/powerpoint/2010/main" val="2156390896"/>
+      </p:ext>
+    </p:extLst>
+  </p:cSld>
+  <p:clrMapOvr>
+    <a:masterClrMapping/>
+  </p:clrMapOvr>
+</p:sld>
+</file>
+
+<file path=ppt/slides/slide25.xml><?xml version="1.0" encoding="utf-8"?>
+<p:sld xmlns:a="http://schemas.openxmlformats.org/drawingml/2006/main" xmlns:r="http://schemas.openxmlformats.org/officeDocument/2006/relationships" xmlns:p="http://schemas.openxmlformats.org/presentationml/2006/main">
+  <p:cSld>
+    <p:spTree>
+      <p:nvGrpSpPr>
+        <p:cNvPr id="1" name=""/>
+        <p:cNvGrpSpPr/>
+        <p:nvPr/>
+      </p:nvGrpSpPr>
+      <p:grpSpPr>
+        <a:xfrm>
+          <a:off x="0" y="0"/>
+          <a:ext cx="0" cy="0"/>
+          <a:chOff x="0" y="0"/>
+          <a:chExt cx="0" cy="0"/>
+        </a:xfrm>
+      </p:grpSpPr>
+      <p:sp>
+        <p:nvSpPr>
+          <p:cNvPr id="2" name="Slide Number Placeholder 1">
+            <a:extLst>
+              <a:ext uri="{FF2B5EF4-FFF2-40B4-BE49-F238E27FC236}">
+                <a16:creationId xmlns:a16="http://schemas.microsoft.com/office/drawing/2014/main" id="{CCFC09C5-BE25-8B13-FA70-CB0E16595FDC}"/>
+              </a:ext>
+            </a:extLst>
+          </p:cNvPr>
+          <p:cNvSpPr>
+            <a:spLocks noGrp="1"/>
+          </p:cNvSpPr>
+          <p:nvPr>
+            <p:ph type="sldNum" sz="quarter" idx="12"/>
+          </p:nvPr>
+        </p:nvSpPr>
+        <p:spPr/>
+        <p:txBody>
+          <a:bodyPr/>
+          <a:lstStyle/>
+          <a:p>
+            <a:fld id="{548469FB-C78A-B94B-B04A-B5BC8C934F85}" type="slidenum">
+              <a:rPr lang="en-US" smtClean="0"/>
+              <a:t>25</a:t>
+            </a:fld>
+            <a:endParaRPr lang="en-US"/>
+          </a:p>
+        </p:txBody>
+      </p:sp>
+      <p:pic>
+        <p:nvPicPr>
+          <p:cNvPr id="3" name="Picture 2" descr="A blue and white screen with white text&#10;&#10;AI-generated content may be incorrect.">
+            <a:extLst>
+              <a:ext uri="{FF2B5EF4-FFF2-40B4-BE49-F238E27FC236}">
+                <a16:creationId xmlns:a16="http://schemas.microsoft.com/office/drawing/2014/main" id="{CADBC4C9-D448-2750-A852-4993872F2D72}"/>
+              </a:ext>
+            </a:extLst>
+          </p:cNvPr>
+          <p:cNvPicPr>
+            <a:picLocks noChangeAspect="1"/>
+          </p:cNvPicPr>
+          <p:nvPr/>
+        </p:nvPicPr>
+        <p:blipFill>
+          <a:blip r:embed="rId2"/>
+          <a:stretch>
+            <a:fillRect/>
+          </a:stretch>
+        </p:blipFill>
+        <p:spPr>
+          <a:xfrm>
+            <a:off x="0" y="0"/>
+            <a:ext cx="12192000" cy="6858000"/>
+          </a:xfrm>
+          <a:prstGeom prst="rect">
+            <a:avLst/>
+          </a:prstGeom>
+        </p:spPr>
+      </p:pic>
+    </p:spTree>
+    <p:extLst>
+      <p:ext uri="{BB962C8B-B14F-4D97-AF65-F5344CB8AC3E}">
+        <p14:creationId xmlns:p14="http://schemas.microsoft.com/office/powerpoint/2010/main" val="2087536791"/>
+      </p:ext>
+    </p:extLst>
+  </p:cSld>
+  <p:clrMapOvr>
+    <a:masterClrMapping/>
+  </p:clrMapOvr>
+</p:sld>
+</file>
+
+<file path=ppt/slides/slide26.xml><?xml version="1.0" encoding="utf-8"?>
 <p:sld xmlns:a="http://schemas.openxmlformats.org/drawingml/2006/main" xmlns:r="http://schemas.openxmlformats.org/officeDocument/2006/relationships" xmlns:p="http://schemas.openxmlformats.org/presentationml/2006/main">
   <p:cSld>
     <p:spTree>
@@ -13690,7 +15876,7 @@
           <a:p>
             <a:fld id="{548469FB-C78A-B94B-B04A-B5BC8C934F85}" type="slidenum">
               <a:rPr lang="en-US" smtClean="0"/>
-              <a:t>23</a:t>
+              <a:t>26</a:t>
             </a:fld>
             <a:endParaRPr lang="en-US"/>
           </a:p>
@@ -13711,10 +15897,10 @@
           <p:nvPr/>
         </p:nvPicPr>
         <p:blipFill>
-          <a:blip r:embed="rId3">
+          <a:blip>
             <a:extLst>
               <a:ext uri="{96DAC541-7B7A-43D3-8B79-37D633B846F1}">
-                <asvg:svgBlip xmlns:asvg="http://schemas.microsoft.com/office/drawing/2016/SVG/main" r:embed="rId4"/>
+                <asvg:svgBlip xmlns:asvg="http://schemas.microsoft.com/office/drawing/2016/SVG/main" r:embed="rId3"/>
               </a:ext>
             </a:extLst>
           </a:blip>
@@ -13745,7 +15931,7 @@
 </p:sld>
 </file>
 
-<file path=ppt/slides/slide24.xml><?xml version="1.0" encoding="utf-8"?>
+<file path=ppt/slides/slide27.xml><?xml version="1.0" encoding="utf-8"?>
 <p:sld xmlns:a="http://schemas.openxmlformats.org/drawingml/2006/main" xmlns:r="http://schemas.openxmlformats.org/officeDocument/2006/relationships" xmlns:p="http://schemas.openxmlformats.org/presentationml/2006/main">
   <p:cSld>
     <p:spTree>
@@ -13859,7 +16045,7 @@
           <a:p>
             <a:fld id="{548469FB-C78A-B94B-B04A-B5BC8C934F85}" type="slidenum">
               <a:rPr lang="en-US" smtClean="0"/>
-              <a:t>24</a:t>
+              <a:t>27</a:t>
             </a:fld>
             <a:endParaRPr lang="en-US"/>
           </a:p>
@@ -13881,7 +16067,12 @@
             <p:ph type="pic" sz="quarter" idx="12"/>
           </p:nvPr>
         </p:nvSpPr>
-        <p:spPr/>
+        <p:spPr>
+          <a:xfrm>
+            <a:off x="4043680" y="232757"/>
+            <a:ext cx="8148320" cy="6858000"/>
+          </a:xfrm>
+        </p:spPr>
         <p:txBody>
           <a:bodyPr/>
           <a:lstStyle/>
@@ -13950,7 +16141,7 @@
 </p:sld>
 </file>
 
-<file path=ppt/slides/slide25.xml><?xml version="1.0" encoding="utf-8"?>
+<file path=ppt/slides/slide28.xml><?xml version="1.0" encoding="utf-8"?>
 <p:sld xmlns:a="http://schemas.openxmlformats.org/drawingml/2006/main" xmlns:r="http://schemas.openxmlformats.org/officeDocument/2006/relationships" xmlns:p="http://schemas.openxmlformats.org/presentationml/2006/main">
   <p:cSld>
     <p:spTree>
@@ -14029,7 +16220,7 @@
           <a:p>
             <a:fld id="{548469FB-C78A-B94B-B04A-B5BC8C934F85}" type="slidenum">
               <a:rPr lang="en-US" smtClean="0"/>
-              <a:t>25</a:t>
+              <a:t>28</a:t>
             </a:fld>
             <a:endParaRPr lang="en-US"/>
           </a:p>
